--- a/curso/pptx/S37.pptx
+++ b/curso/pptx/S37.pptx
@@ -3890,8 +3890,8 @@
         </p:nvSpPr>
         <p:spPr>
           <a:xfrm>
-            <a:off x="640000" y="420000"/>
-            <a:ext cx="10912000" cy="420000"/>
+            <a:off x="10652000" y="380000"/>
+            <a:ext cx="900000" cy="800000"/>
           </a:xfrm>
           <a:prstGeom prst="rect">
             <a:avLst/>
@@ -3906,17 +3906,17 @@
           <a:p>
             <a:pPr>
               <a:spcAft>
-                <a:spcPts val="810"/>
+                <a:spcPts val="1980"/>
               </a:spcAft>
             </a:pPr>
             <a:r>
-              <a:rPr sz="1800" b="1">
+              <a:rPr sz="4400" b="0">
                 <a:solidFill>
                   <a:srgbClr val="1F2A44"/>
                 </a:solidFill>
                 <a:latin typeface="Nunito Sans"/>
               </a:rPr>
-              <a:t>🦉 Aula de Filosofía</a:t>
+              <a:t>🙃</a:t>
             </a:r>
           </a:p>
         </p:txBody>

--- a/curso/pptx/S37.pptx
+++ b/curso/pptx/S37.pptx
@@ -471,426 +471,6 @@
     </a:lvl9pPr>
   </p:notesStyle>
 </p:notesMaster>
-</file>
-
-<file path=ppt/notesSlides/notesSlide1.xml><?xml version="1.0" encoding="utf-8"?>
-<p:notes xmlns:a="http://schemas.openxmlformats.org/drawingml/2006/main" xmlns:p="http://schemas.openxmlformats.org/presentationml/2006/main" xmlns:r="http://schemas.openxmlformats.org/officeDocument/2006/relationships">
-  <p:cSld>
-    <p:spTree>
-      <p:nvGrpSpPr>
-        <p:cNvPr id="1" name=""/>
-        <p:cNvGrpSpPr/>
-        <p:nvPr/>
-      </p:nvGrpSpPr>
-      <p:grpSpPr>
-        <a:xfrm>
-          <a:off x="0" y="0"/>
-          <a:ext cx="0" cy="0"/>
-          <a:chOff x="0" y="0"/>
-          <a:chExt cx="0" cy="0"/>
-        </a:xfrm>
-      </p:grpSpPr>
-      <p:sp>
-        <p:nvSpPr>
-          <p:cNvPr id="2" name="Slide Image Placeholder 1"/>
-          <p:cNvSpPr>
-            <a:spLocks noGrp="1"/>
-          </p:cNvSpPr>
-          <p:nvPr>
-            <p:ph type="sldImg" idx="2"/>
-          </p:nvPr>
-        </p:nvSpPr>
-        <p:spPr/>
-      </p:sp>
-      <p:sp>
-        <p:nvSpPr>
-          <p:cNvPr id="3" name="Notes Placeholder 2"/>
-          <p:cNvSpPr>
-            <a:spLocks noGrp="1"/>
-          </p:cNvSpPr>
-          <p:nvPr>
-            <p:ph type="body" idx="3" sz="quarter"/>
-          </p:nvPr>
-        </p:nvSpPr>
-        <p:spPr/>
-        <p:txBody>
-          <a:bodyPr/>
-          <a:lstStyle/>
-          <a:p>
-            <a:r>
-              <a:t>3 minutos. Sin apuntes. Es para recordar, no cuenta para nota.</a:t>
-            </a:r>
-          </a:p>
-        </p:txBody>
-      </p:sp>
-      <p:sp>
-        <p:nvSpPr>
-          <p:cNvPr id="4" name="Slide Number Placeholder 3"/>
-          <p:cNvSpPr>
-            <a:spLocks noGrp="1"/>
-          </p:cNvSpPr>
-          <p:nvPr>
-            <p:ph type="sldNum" idx="5" sz="quarter"/>
-          </p:nvPr>
-        </p:nvSpPr>
-        <p:spPr/>
-      </p:sp>
-    </p:spTree>
-  </p:cSld>
-  <p:clrMapOvr>
-    <a:masterClrMapping/>
-  </p:clrMapOvr>
-</p:notes>
-</file>
-
-<file path=ppt/notesSlides/notesSlide2.xml><?xml version="1.0" encoding="utf-8"?>
-<p:notes xmlns:a="http://schemas.openxmlformats.org/drawingml/2006/main" xmlns:p="http://schemas.openxmlformats.org/presentationml/2006/main" xmlns:r="http://schemas.openxmlformats.org/officeDocument/2006/relationships">
-  <p:cSld>
-    <p:spTree>
-      <p:nvGrpSpPr>
-        <p:cNvPr id="1" name=""/>
-        <p:cNvGrpSpPr/>
-        <p:nvPr/>
-      </p:nvGrpSpPr>
-      <p:grpSpPr>
-        <a:xfrm>
-          <a:off x="0" y="0"/>
-          <a:ext cx="0" cy="0"/>
-          <a:chOff x="0" y="0"/>
-          <a:chExt cx="0" cy="0"/>
-        </a:xfrm>
-      </p:grpSpPr>
-      <p:sp>
-        <p:nvSpPr>
-          <p:cNvPr id="2" name="Slide Image Placeholder 1"/>
-          <p:cNvSpPr>
-            <a:spLocks noGrp="1"/>
-          </p:cNvSpPr>
-          <p:nvPr>
-            <p:ph type="sldImg" idx="2"/>
-          </p:nvPr>
-        </p:nvSpPr>
-        <p:spPr/>
-      </p:sp>
-      <p:sp>
-        <p:nvSpPr>
-          <p:cNvPr id="3" name="Notes Placeholder 2"/>
-          <p:cNvSpPr>
-            <a:spLocks noGrp="1"/>
-          </p:cNvSpPr>
-          <p:nvPr>
-            <p:ph type="body" idx="3" sz="quarter"/>
-          </p:nvPr>
-        </p:nvSpPr>
-        <p:spPr/>
-        <p:txBody>
-          <a:bodyPr/>
-          <a:lstStyle/>
-          <a:p>
-            <a:r>
-              <a:t>3 minutos. Sin apuntes. Es para recordar, no cuenta para nota.</a:t>
-            </a:r>
-          </a:p>
-        </p:txBody>
-      </p:sp>
-      <p:sp>
-        <p:nvSpPr>
-          <p:cNvPr id="4" name="Slide Number Placeholder 3"/>
-          <p:cNvSpPr>
-            <a:spLocks noGrp="1"/>
-          </p:cNvSpPr>
-          <p:nvPr>
-            <p:ph type="sldNum" idx="5" sz="quarter"/>
-          </p:nvPr>
-        </p:nvSpPr>
-        <p:spPr/>
-      </p:sp>
-    </p:spTree>
-  </p:cSld>
-  <p:clrMapOvr>
-    <a:masterClrMapping/>
-  </p:clrMapOvr>
-</p:notes>
-</file>
-
-<file path=ppt/notesSlides/notesSlide3.xml><?xml version="1.0" encoding="utf-8"?>
-<p:notes xmlns:a="http://schemas.openxmlformats.org/drawingml/2006/main" xmlns:p="http://schemas.openxmlformats.org/presentationml/2006/main" xmlns:r="http://schemas.openxmlformats.org/officeDocument/2006/relationships">
-  <p:cSld>
-    <p:spTree>
-      <p:nvGrpSpPr>
-        <p:cNvPr id="1" name=""/>
-        <p:cNvGrpSpPr/>
-        <p:nvPr/>
-      </p:nvGrpSpPr>
-      <p:grpSpPr>
-        <a:xfrm>
-          <a:off x="0" y="0"/>
-          <a:ext cx="0" cy="0"/>
-          <a:chOff x="0" y="0"/>
-          <a:chExt cx="0" cy="0"/>
-        </a:xfrm>
-      </p:grpSpPr>
-      <p:sp>
-        <p:nvSpPr>
-          <p:cNvPr id="2" name="Slide Image Placeholder 1"/>
-          <p:cNvSpPr>
-            <a:spLocks noGrp="1"/>
-          </p:cNvSpPr>
-          <p:nvPr>
-            <p:ph type="sldImg" idx="2"/>
-          </p:nvPr>
-        </p:nvSpPr>
-        <p:spPr/>
-      </p:sp>
-      <p:sp>
-        <p:nvSpPr>
-          <p:cNvPr id="3" name="Notes Placeholder 2"/>
-          <p:cNvSpPr>
-            <a:spLocks noGrp="1"/>
-          </p:cNvSpPr>
-          <p:nvPr>
-            <p:ph type="body" idx="3" sz="quarter"/>
-          </p:nvPr>
-        </p:nvSpPr>
-        <p:spPr/>
-        <p:txBody>
-          <a:bodyPr/>
-          <a:lstStyle/>
-          <a:p>
-            <a:r>
-              <a:t>Nadie tiene que contestar: solo pensarlo.</a:t>
-            </a:r>
-          </a:p>
-        </p:txBody>
-      </p:sp>
-      <p:sp>
-        <p:nvSpPr>
-          <p:cNvPr id="4" name="Slide Number Placeholder 3"/>
-          <p:cNvSpPr>
-            <a:spLocks noGrp="1"/>
-          </p:cNvSpPr>
-          <p:nvPr>
-            <p:ph type="sldNum" idx="5" sz="quarter"/>
-          </p:nvPr>
-        </p:nvSpPr>
-        <p:spPr/>
-      </p:sp>
-    </p:spTree>
-  </p:cSld>
-  <p:clrMapOvr>
-    <a:masterClrMapping/>
-  </p:clrMapOvr>
-</p:notes>
-</file>
-
-<file path=ppt/notesSlides/notesSlide4.xml><?xml version="1.0" encoding="utf-8"?>
-<p:notes xmlns:a="http://schemas.openxmlformats.org/drawingml/2006/main" xmlns:p="http://schemas.openxmlformats.org/presentationml/2006/main" xmlns:r="http://schemas.openxmlformats.org/officeDocument/2006/relationships">
-  <p:cSld>
-    <p:spTree>
-      <p:nvGrpSpPr>
-        <p:cNvPr id="1" name=""/>
-        <p:cNvGrpSpPr/>
-        <p:nvPr/>
-      </p:nvGrpSpPr>
-      <p:grpSpPr>
-        <a:xfrm>
-          <a:off x="0" y="0"/>
-          <a:ext cx="0" cy="0"/>
-          <a:chOff x="0" y="0"/>
-          <a:chExt cx="0" cy="0"/>
-        </a:xfrm>
-      </p:grpSpPr>
-      <p:sp>
-        <p:nvSpPr>
-          <p:cNvPr id="2" name="Slide Image Placeholder 1"/>
-          <p:cNvSpPr>
-            <a:spLocks noGrp="1"/>
-          </p:cNvSpPr>
-          <p:nvPr>
-            <p:ph type="sldImg" idx="2"/>
-          </p:nvPr>
-        </p:nvSpPr>
-        <p:spPr/>
-      </p:sp>
-      <p:sp>
-        <p:nvSpPr>
-          <p:cNvPr id="3" name="Notes Placeholder 2"/>
-          <p:cNvSpPr>
-            <a:spLocks noGrp="1"/>
-          </p:cNvSpPr>
-          <p:nvPr>
-            <p:ph type="body" idx="3" sz="quarter"/>
-          </p:nvPr>
-        </p:nvSpPr>
-        <p:spPr/>
-        <p:txBody>
-          <a:bodyPr/>
-          <a:lstStyle/>
-          <a:p>
-            <a:r>
-              <a:t>Dejar unos segundos para que piensen la respuesta fácil antes de enseñar los pasos.</a:t>
-            </a:r>
-          </a:p>
-        </p:txBody>
-      </p:sp>
-      <p:sp>
-        <p:nvSpPr>
-          <p:cNvPr id="4" name="Slide Number Placeholder 3"/>
-          <p:cNvSpPr>
-            <a:spLocks noGrp="1"/>
-          </p:cNvSpPr>
-          <p:nvPr>
-            <p:ph type="sldNum" idx="5" sz="quarter"/>
-          </p:nvPr>
-        </p:nvSpPr>
-        <p:spPr/>
-      </p:sp>
-    </p:spTree>
-  </p:cSld>
-  <p:clrMapOvr>
-    <a:masterClrMapping/>
-  </p:clrMapOvr>
-</p:notes>
-</file>
-
-<file path=ppt/notesSlides/notesSlide5.xml><?xml version="1.0" encoding="utf-8"?>
-<p:notes xmlns:a="http://schemas.openxmlformats.org/drawingml/2006/main" xmlns:p="http://schemas.openxmlformats.org/presentationml/2006/main" xmlns:r="http://schemas.openxmlformats.org/officeDocument/2006/relationships">
-  <p:cSld>
-    <p:spTree>
-      <p:nvGrpSpPr>
-        <p:cNvPr id="1" name=""/>
-        <p:cNvGrpSpPr/>
-        <p:nvPr/>
-      </p:nvGrpSpPr>
-      <p:grpSpPr>
-        <a:xfrm>
-          <a:off x="0" y="0"/>
-          <a:ext cx="0" cy="0"/>
-          <a:chOff x="0" y="0"/>
-          <a:chExt cx="0" cy="0"/>
-        </a:xfrm>
-      </p:grpSpPr>
-      <p:sp>
-        <p:nvSpPr>
-          <p:cNvPr id="2" name="Slide Image Placeholder 1"/>
-          <p:cNvSpPr>
-            <a:spLocks noGrp="1"/>
-          </p:cNvSpPr>
-          <p:nvPr>
-            <p:ph type="sldImg" idx="2"/>
-          </p:nvPr>
-        </p:nvSpPr>
-        <p:spPr/>
-      </p:sp>
-      <p:sp>
-        <p:nvSpPr>
-          <p:cNvPr id="3" name="Notes Placeholder 2"/>
-          <p:cNvSpPr>
-            <a:spLocks noGrp="1"/>
-          </p:cNvSpPr>
-          <p:nvPr>
-            <p:ph type="body" idx="3" sz="quarter"/>
-          </p:nvPr>
-        </p:nvSpPr>
-        <p:spPr/>
-        <p:txBody>
-          <a:bodyPr/>
-          <a:lstStyle/>
-          <a:p>
-            <a:r>
-              <a:t>Dejar 2 minutos para que lo escriban. La diapositiva siguiente muestra el resumen.</a:t>
-            </a:r>
-          </a:p>
-        </p:txBody>
-      </p:sp>
-      <p:sp>
-        <p:nvSpPr>
-          <p:cNvPr id="4" name="Slide Number Placeholder 3"/>
-          <p:cNvSpPr>
-            <a:spLocks noGrp="1"/>
-          </p:cNvSpPr>
-          <p:nvPr>
-            <p:ph type="sldNum" idx="5" sz="quarter"/>
-          </p:nvPr>
-        </p:nvSpPr>
-        <p:spPr/>
-      </p:sp>
-    </p:spTree>
-  </p:cSld>
-  <p:clrMapOvr>
-    <a:masterClrMapping/>
-  </p:clrMapOvr>
-</p:notes>
-</file>
-
-<file path=ppt/notesSlides/notesSlide6.xml><?xml version="1.0" encoding="utf-8"?>
-<p:notes xmlns:a="http://schemas.openxmlformats.org/drawingml/2006/main" xmlns:p="http://schemas.openxmlformats.org/presentationml/2006/main" xmlns:r="http://schemas.openxmlformats.org/officeDocument/2006/relationships">
-  <p:cSld>
-    <p:spTree>
-      <p:nvGrpSpPr>
-        <p:cNvPr id="1" name=""/>
-        <p:cNvGrpSpPr/>
-        <p:nvPr/>
-      </p:nvGrpSpPr>
-      <p:grpSpPr>
-        <a:xfrm>
-          <a:off x="0" y="0"/>
-          <a:ext cx="0" cy="0"/>
-          <a:chOff x="0" y="0"/>
-          <a:chExt cx="0" cy="0"/>
-        </a:xfrm>
-      </p:grpSpPr>
-      <p:sp>
-        <p:nvSpPr>
-          <p:cNvPr id="2" name="Slide Image Placeholder 1"/>
-          <p:cNvSpPr>
-            <a:spLocks noGrp="1"/>
-          </p:cNvSpPr>
-          <p:nvPr>
-            <p:ph type="sldImg" idx="2"/>
-          </p:nvPr>
-        </p:nvSpPr>
-        <p:spPr/>
-      </p:sp>
-      <p:sp>
-        <p:nvSpPr>
-          <p:cNvPr id="3" name="Notes Placeholder 2"/>
-          <p:cNvSpPr>
-            <a:spLocks noGrp="1"/>
-          </p:cNvSpPr>
-          <p:nvPr>
-            <p:ph type="body" idx="3" sz="quarter"/>
-          </p:nvPr>
-        </p:nvSpPr>
-        <p:spPr/>
-        <p:txBody>
-          <a:bodyPr/>
-          <a:lstStyle/>
-          <a:p>
-            <a:r>
-              <a:t>Buscar: «porcentajes engañosos» · «riesgo relativo y riesgo absoluto explicado»</a:t>
-            </a:r>
-          </a:p>
-        </p:txBody>
-      </p:sp>
-      <p:sp>
-        <p:nvSpPr>
-          <p:cNvPr id="4" name="Slide Number Placeholder 3"/>
-          <p:cNvSpPr>
-            <a:spLocks noGrp="1"/>
-          </p:cNvSpPr>
-          <p:nvPr>
-            <p:ph type="sldNum" idx="5" sz="quarter"/>
-          </p:nvPr>
-        </p:nvSpPr>
-        <p:spPr/>
-      </p:sp>
-    </p:spTree>
-  </p:cSld>
-  <p:clrMapOvr>
-    <a:masterClrMapping/>
-  </p:clrMapOvr>
-</p:notes>
 </file>
 
 <file path=ppt/slideLayouts/slideLayout1.xml><?xml version="1.0" encoding="utf-8"?>

--- a/curso/pptx/S37.pptx
+++ b/curso/pptx/S37.pptx
@@ -4335,7 +4335,7 @@
                 </a:solidFill>
                 <a:latin typeface="Fredoka"/>
               </a:rPr>
-              <a:t>Caso 3 · Dos clases</a:t>
+              <a:t>Caso 3 · Dos institutos</a:t>
             </a:r>
           </a:p>
         </p:txBody>
@@ -4417,7 +4417,7 @@
                 </a:solidFill>
                 <a:latin typeface="Nunito Sans"/>
               </a:rPr>
-              <a:t>En la clase A hay 20 aprobados. En la clase B hay 15. ¿Qué clase lo hizo mejor? (Ejemplo inventado.)</a:t>
+              <a:t>En el instituto A hay 20 aprobados. En el instituto B hay 15. ¿Qué instituto lo hizo mejor? (Ejemplo inventado.)</a:t>
             </a:r>
           </a:p>
         </p:txBody>

--- a/curso/pptx/S37.pptx
+++ b/curso/pptx/S37.pptx
@@ -21,7 +21,6 @@
     <p:sldId id="269" r:id="rId21"/>
     <p:sldId id="270" r:id="rId22"/>
     <p:sldId id="271" r:id="rId23"/>
-    <p:sldId id="272" r:id="rId24"/>
   </p:sldIdLst>
   <p:sldSz cx="12192000" cy="6858000" type="screen4x3"/>
   <p:notesSz cx="6858000" cy="9144000"/>
@@ -3535,7 +3534,7 @@
                 </a:solidFill>
                 <a:latin typeface="Nunito Sans"/>
               </a:rPr>
-              <a:t>PENSAMIENTO CRÍTICO · SESIÓN 37 · UNIDAD 7 · NÚMEROS QUE ENGAÑAN</a:t>
+              <a:t>PENSAMIENTO CRÍTICO · SESIÓN 37 · UNIDAD 6 · INFORMACIÓN Y FUENTES</a:t>
             </a:r>
           </a:p>
         </p:txBody>
@@ -3574,7 +3573,7 @@
                 </a:solidFill>
                 <a:latin typeface="Fredoka"/>
               </a:rPr>
-              <a:t>Porcentajes y cifras</a:t>
+              <a:t>Repaso y examen de la unidad 6</a:t>
             </a:r>
           </a:p>
         </p:txBody>
@@ -3613,7 +3612,7 @@
                 </a:solidFill>
                 <a:latin typeface="Nunito Sans"/>
               </a:rPr>
-              <a:t>Una cifra sola puede engañar: «el doble» de casi nada sigue siendo casi nada, así que hay que preguntar «¿de cuántos?».</a:t>
+              <a:t>Repasamos qué hace fiable una fuente, el clickbait, los bulos, cómo verificar y cómo se manipulan imágenes y vídeos.</a:t>
             </a:r>
           </a:p>
         </p:txBody>
@@ -3678,7 +3677,7 @@
                 </a:solidFill>
                 <a:latin typeface="Nunito Sans"/>
               </a:rPr>
-              <a:t>BLOQUE 2 · CASOS RESUELTOS</a:t>
+              <a:t>BLOQUE 1 · REPASO DE LA UNIDAD</a:t>
             </a:r>
           </a:p>
         </p:txBody>
@@ -3717,216 +3716,267 @@
                 </a:solidFill>
                 <a:latin typeface="Fredoka"/>
               </a:rPr>
-              <a:t>Caso 1 · El patinete</a:t>
-            </a:r>
-          </a:p>
-        </p:txBody>
-      </p:sp>
-      <p:sp>
-        <p:nvSpPr>
-          <p:cNvPr id="4" name="Rectangle 3"/>
-          <p:cNvSpPr/>
+              <a:t>Imágenes manipuladas (sesión 36)</a:t>
+            </a:r>
+          </a:p>
+        </p:txBody>
+      </p:sp>
+      <p:graphicFrame>
+        <p:nvGraphicFramePr>
+          <p:cNvPr id="4" name="Table 3"/>
+          <p:cNvGraphicFramePr>
+            <a:graphicFrameLocks noGrp="1"/>
+          </p:cNvGraphicFramePr>
           <p:nvPr/>
-        </p:nvSpPr>
-        <p:spPr>
-          <a:xfrm>
-            <a:off x="640000" y="1600000"/>
-            <a:ext cx="10912000" cy="1100000"/>
-          </a:xfrm>
-          <a:prstGeom prst="rect">
-            <a:avLst/>
-          </a:prstGeom>
-          <a:solidFill>
-            <a:srgbClr val="FFFFFF"/>
-          </a:solidFill>
-          <a:ln>
-            <a:noFill/>
-          </a:ln>
-        </p:spPr>
-        <p:style>
-          <a:lnRef idx="1">
-            <a:schemeClr val="accent1"/>
-          </a:lnRef>
-          <a:fillRef idx="3">
-            <a:schemeClr val="accent1"/>
-          </a:fillRef>
-          <a:effectRef idx="2">
-            <a:schemeClr val="accent1"/>
-          </a:effectRef>
-          <a:fontRef idx="minor">
-            <a:schemeClr val="lt1"/>
-          </a:fontRef>
-        </p:style>
-        <p:txBody>
-          <a:bodyPr rtlCol="0" anchor="ctr"/>
-          <a:lstStyle/>
-          <a:p>
-            <a:pPr algn="ctr"/>
-          </a:p>
-        </p:txBody>
-      </p:sp>
-      <p:sp>
-        <p:nvSpPr>
-          <p:cNvPr id="5" name="TextBox 4"/>
-          <p:cNvSpPr txBox="1"/>
-          <p:nvPr/>
-        </p:nvSpPr>
-        <p:spPr>
-          <a:xfrm>
-            <a:off x="840000" y="1650000"/>
-            <a:ext cx="10512000" cy="1000000"/>
-          </a:xfrm>
-          <a:prstGeom prst="rect">
-            <a:avLst/>
-          </a:prstGeom>
-          <a:noFill/>
-        </p:spPr>
-        <p:txBody>
-          <a:bodyPr wrap="square" anchor="ctr">
-            <a:spAutoFit/>
-          </a:bodyPr>
-          <a:lstStyle/>
-          <a:p>
-            <a:pPr>
-              <a:spcAft>
-                <a:spcPts val="1170"/>
-              </a:spcAft>
-            </a:pPr>
-            <a:r>
-              <a:rPr sz="2600" b="1">
-                <a:solidFill>
-                  <a:srgbClr val="1F2A44"/>
-                </a:solidFill>
-                <a:latin typeface="Nunito Sans"/>
-              </a:rPr>
-              <a:t>El titular del principio: «¡Los accidentes con patinete en el barrio han subido un 100 %!» (Ejemplo inventado.)</a:t>
-            </a:r>
-          </a:p>
-        </p:txBody>
-      </p:sp>
-      <p:sp>
-        <p:nvSpPr>
-          <p:cNvPr id="6" name="TextBox 5"/>
-          <p:cNvSpPr txBox="1"/>
-          <p:nvPr/>
-        </p:nvSpPr>
-        <p:spPr>
-          <a:xfrm>
-            <a:off x="640000" y="2900000"/>
-            <a:ext cx="10912000" cy="3500000"/>
-          </a:xfrm>
-          <a:prstGeom prst="rect">
-            <a:avLst/>
-          </a:prstGeom>
-          <a:noFill/>
-        </p:spPr>
-        <p:txBody>
-          <a:bodyPr wrap="square">
-            <a:spAutoFit/>
-          </a:bodyPr>
-          <a:lstStyle/>
-          <a:p>
-            <a:pPr>
-              <a:spcAft>
-                <a:spcPts val="1080"/>
-              </a:spcAft>
-            </a:pPr>
-            <a:r>
-              <a:rPr sz="2400" b="1">
-                <a:solidFill>
-                  <a:srgbClr val="E8793A"/>
-                </a:solidFill>
-                <a:latin typeface="Nunito Sans"/>
-              </a:rPr>
-              <a:t>1. </a:t>
-            </a:r>
-            <a:r>
-              <a:rPr sz="2400" b="0">
-                <a:solidFill>
-                  <a:srgbClr val="1F2A44"/>
-                </a:solidFill>
-                <a:latin typeface="Nunito Sans"/>
-              </a:rPr>
-              <a:t>¿Qué significa subir un 100 %? Que ahora hay el doble que antes.</a:t>
-            </a:r>
-          </a:p>
-          <a:p>
-            <a:pPr>
-              <a:spcAft>
-                <a:spcPts val="1080"/>
-              </a:spcAft>
-            </a:pPr>
-            <a:r>
-              <a:rPr sz="2400" b="1">
-                <a:solidFill>
-                  <a:srgbClr val="E8793A"/>
-                </a:solidFill>
-                <a:latin typeface="Nunito Sans"/>
-              </a:rPr>
-              <a:t>2. </a:t>
-            </a:r>
-            <a:r>
-              <a:rPr sz="2400" b="0">
-                <a:solidFill>
-                  <a:srgbClr val="1F2A44"/>
-                </a:solidFill>
-                <a:latin typeface="Nunito Sans"/>
-              </a:rPr>
-              <a:t>¿El doble de cuánto? Miro el dato: el año pasado hubo 2 accidentes; este año, 4.</a:t>
-            </a:r>
-          </a:p>
-          <a:p>
-            <a:pPr>
-              <a:spcAft>
-                <a:spcPts val="1080"/>
-              </a:spcAft>
-            </a:pPr>
-            <a:r>
-              <a:rPr sz="2400" b="1">
-                <a:solidFill>
-                  <a:srgbClr val="E8793A"/>
-                </a:solidFill>
-                <a:latin typeface="Nunito Sans"/>
-              </a:rPr>
-              <a:t>3. </a:t>
-            </a:r>
-            <a:r>
-              <a:rPr sz="2400" b="0">
-                <a:solidFill>
-                  <a:srgbClr val="1F2A44"/>
-                </a:solidFill>
-                <a:latin typeface="Nunito Sans"/>
-              </a:rPr>
-              <a:t>Son 2 accidentes más. Importa, pero con números tan pequeños no es una ola de accidentes.</a:t>
-            </a:r>
-          </a:p>
-          <a:p>
-            <a:pPr>
-              <a:spcAft>
-                <a:spcPts val="1080"/>
-              </a:spcAft>
-            </a:pPr>
-            <a:r>
-              <a:rPr sz="2400" b="1">
-                <a:solidFill>
-                  <a:srgbClr val="E8793A"/>
-                </a:solidFill>
-                <a:latin typeface="Nunito Sans"/>
-              </a:rPr>
-              <a:t>4. </a:t>
-            </a:r>
-            <a:r>
-              <a:rPr sz="2400" b="0">
-                <a:solidFill>
-                  <a:srgbClr val="1F2A44"/>
-                </a:solidFill>
-                <a:latin typeface="Nunito Sans"/>
-              </a:rPr>
-              <a:t>Conclusión: un porcentaje sin la cifra de partida puede asustar sin motivo. Pregunto «¿de cuántos?».</a:t>
-            </a:r>
-          </a:p>
-        </p:txBody>
-      </p:sp>
+        </p:nvGraphicFramePr>
+        <p:xfrm>
+          <a:off x="640000" y="1700000"/>
+          <a:ext cx="10912000" cy="3000000"/>
+        </p:xfrm>
+        <a:graphic>
+          <a:graphicData uri="http://schemas.openxmlformats.org/drawingml/2006/table">
+            <a:tbl>
+              <a:tblPr firstRow="1" bandRow="1">
+                <a:tableStyleId>{5C22544A-7EE6-4342-B048-85BDC9FD1C3A}</a:tableStyleId>
+              </a:tblPr>
+              <a:tblGrid>
+                <a:gridCol w="5456000"/>
+                <a:gridCol w="5456000"/>
+              </a:tblGrid>
+              <a:tr h="600000">
+                <a:tc>
+                  <a:txBody>
+                    <a:bodyPr/>
+                    <a:lstStyle/>
+                    <a:p>
+                      <a:r>
+                        <a:rPr sz="2000" b="1">
+                          <a:solidFill>
+                            <a:srgbClr val="FBF7EF"/>
+                          </a:solidFill>
+                          <a:latin typeface="Fredoka"/>
+                        </a:rPr>
+                        <a:t>Truco</a:t>
+                      </a:r>
+                    </a:p>
+                  </a:txBody>
+                  <a:tcPr>
+                    <a:solidFill>
+                      <a:srgbClr val="1F2A44"/>
+                    </a:solidFill>
+                  </a:tcPr>
+                </a:tc>
+                <a:tc>
+                  <a:txBody>
+                    <a:bodyPr/>
+                    <a:lstStyle/>
+                    <a:p>
+                      <a:r>
+                        <a:rPr sz="2000" b="1">
+                          <a:solidFill>
+                            <a:srgbClr val="FBF7EF"/>
+                          </a:solidFill>
+                          <a:latin typeface="Fredoka"/>
+                        </a:rPr>
+                        <a:t>Qué es</a:t>
+                      </a:r>
+                    </a:p>
+                  </a:txBody>
+                  <a:tcPr>
+                    <a:solidFill>
+                      <a:srgbClr val="1F2A44"/>
+                    </a:solidFill>
+                  </a:tcPr>
+                </a:tc>
+              </a:tr>
+              <a:tr h="600000">
+                <a:tc>
+                  <a:txBody>
+                    <a:bodyPr/>
+                    <a:lstStyle/>
+                    <a:p>
+                      <a:r>
+                        <a:rPr sz="2000" b="1">
+                          <a:solidFill>
+                            <a:srgbClr val="1F2A44"/>
+                          </a:solidFill>
+                          <a:latin typeface="Nunito Sans"/>
+                        </a:rPr>
+                        <a:t>Recorte</a:t>
+                      </a:r>
+                    </a:p>
+                  </a:txBody>
+                  <a:tcPr>
+                    <a:solidFill>
+                      <a:srgbClr val="FFFFFF"/>
+                    </a:solidFill>
+                  </a:tcPr>
+                </a:tc>
+                <a:tc>
+                  <a:txBody>
+                    <a:bodyPr/>
+                    <a:lstStyle/>
+                    <a:p>
+                      <a:r>
+                        <a:rPr sz="2000" b="0">
+                          <a:solidFill>
+                            <a:srgbClr val="1F2A44"/>
+                          </a:solidFill>
+                          <a:latin typeface="Nunito Sans"/>
+                        </a:rPr>
+                        <a:t>Se corta la foto para esconder una parte</a:t>
+                      </a:r>
+                    </a:p>
+                  </a:txBody>
+                  <a:tcPr>
+                    <a:solidFill>
+                      <a:srgbClr val="FFFFFF"/>
+                    </a:solidFill>
+                  </a:tcPr>
+                </a:tc>
+              </a:tr>
+              <a:tr h="600000">
+                <a:tc>
+                  <a:txBody>
+                    <a:bodyPr/>
+                    <a:lstStyle/>
+                    <a:p>
+                      <a:r>
+                        <a:rPr sz="2000" b="1">
+                          <a:solidFill>
+                            <a:srgbClr val="1F2A44"/>
+                          </a:solidFill>
+                          <a:latin typeface="Nunito Sans"/>
+                        </a:rPr>
+                        <a:t>Montaje</a:t>
+                      </a:r>
+                    </a:p>
+                  </a:txBody>
+                  <a:tcPr>
+                    <a:solidFill>
+                      <a:srgbClr val="EAF0F7"/>
+                    </a:solidFill>
+                  </a:tcPr>
+                </a:tc>
+                <a:tc>
+                  <a:txBody>
+                    <a:bodyPr/>
+                    <a:lstStyle/>
+                    <a:p>
+                      <a:r>
+                        <a:rPr sz="2000" b="0">
+                          <a:solidFill>
+                            <a:srgbClr val="1F2A44"/>
+                          </a:solidFill>
+                          <a:latin typeface="Nunito Sans"/>
+                        </a:rPr>
+                        <a:t>Se juntan o cambian partes de imágenes</a:t>
+                      </a:r>
+                    </a:p>
+                  </a:txBody>
+                  <a:tcPr>
+                    <a:solidFill>
+                      <a:srgbClr val="EAF0F7"/>
+                    </a:solidFill>
+                  </a:tcPr>
+                </a:tc>
+              </a:tr>
+              <a:tr h="600000">
+                <a:tc>
+                  <a:txBody>
+                    <a:bodyPr/>
+                    <a:lstStyle/>
+                    <a:p>
+                      <a:r>
+                        <a:rPr sz="2000" b="1">
+                          <a:solidFill>
+                            <a:srgbClr val="1F2A44"/>
+                          </a:solidFill>
+                          <a:latin typeface="Nunito Sans"/>
+                        </a:rPr>
+                        <a:t>Fuera de contexto</a:t>
+                      </a:r>
+                    </a:p>
+                  </a:txBody>
+                  <a:tcPr>
+                    <a:solidFill>
+                      <a:srgbClr val="FFFFFF"/>
+                    </a:solidFill>
+                  </a:tcPr>
+                </a:tc>
+                <a:tc>
+                  <a:txBody>
+                    <a:bodyPr/>
+                    <a:lstStyle/>
+                    <a:p>
+                      <a:r>
+                        <a:rPr sz="2000" b="0">
+                          <a:solidFill>
+                            <a:srgbClr val="1F2A44"/>
+                          </a:solidFill>
+                          <a:latin typeface="Nunito Sans"/>
+                        </a:rPr>
+                        <a:t>Foto real, pero de otro sitio o fecha</a:t>
+                      </a:r>
+                    </a:p>
+                  </a:txBody>
+                  <a:tcPr>
+                    <a:solidFill>
+                      <a:srgbClr val="FFFFFF"/>
+                    </a:solidFill>
+                  </a:tcPr>
+                </a:tc>
+              </a:tr>
+              <a:tr h="600000">
+                <a:tc>
+                  <a:txBody>
+                    <a:bodyPr/>
+                    <a:lstStyle/>
+                    <a:p>
+                      <a:r>
+                        <a:rPr sz="2000" b="1">
+                          <a:solidFill>
+                            <a:srgbClr val="1F2A44"/>
+                          </a:solidFill>
+                          <a:latin typeface="Nunito Sans"/>
+                        </a:rPr>
+                        <a:t>Deepfake</a:t>
+                      </a:r>
+                    </a:p>
+                  </a:txBody>
+                  <a:tcPr>
+                    <a:solidFill>
+                      <a:srgbClr val="EAF0F7"/>
+                    </a:solidFill>
+                  </a:tcPr>
+                </a:tc>
+                <a:tc>
+                  <a:txBody>
+                    <a:bodyPr/>
+                    <a:lstStyle/>
+                    <a:p>
+                      <a:r>
+                        <a:rPr sz="2000" b="0">
+                          <a:solidFill>
+                            <a:srgbClr val="1F2A44"/>
+                          </a:solidFill>
+                          <a:latin typeface="Nunito Sans"/>
+                        </a:rPr>
+                        <a:t>Hecho con IA; mirar no basta, busco la fuente</a:t>
+                      </a:r>
+                    </a:p>
+                  </a:txBody>
+                  <a:tcPr>
+                    <a:solidFill>
+                      <a:srgbClr val="EAF0F7"/>
+                    </a:solidFill>
+                  </a:tcPr>
+                </a:tc>
+              </a:tr>
+            </a:tbl>
+          </a:graphicData>
+        </a:graphic>
+      </p:graphicFrame>
     </p:spTree>
   </p:cSld>
   <p:clrMapOvr>
@@ -3941,7 +3991,7 @@
     <p:bg>
       <p:bgPr>
         <a:solidFill>
-          <a:srgbClr val="FBF7EF"/>
+          <a:srgbClr val="1F2A44"/>
         </a:solidFill>
         <a:effectLst/>
       </p:bgPr>
@@ -3961,8 +4011,8 @@
         </p:nvSpPr>
         <p:spPr>
           <a:xfrm>
-            <a:off x="640000" y="380000"/>
-            <a:ext cx="10912000" cy="420000"/>
+            <a:off x="640000" y="2300000"/>
+            <a:ext cx="10912000" cy="500000"/>
           </a:xfrm>
           <a:prstGeom prst="rect">
             <a:avLst/>
@@ -3977,17 +4027,17 @@
           <a:p>
             <a:pPr>
               <a:spcAft>
-                <a:spcPts val="630"/>
+                <a:spcPts val="810"/>
               </a:spcAft>
             </a:pPr>
             <a:r>
-              <a:rPr sz="1400" b="1">
-                <a:solidFill>
-                  <a:srgbClr val="E8793A"/>
-                </a:solidFill>
-                <a:latin typeface="Nunito Sans"/>
-              </a:rPr>
-              <a:t>BLOQUE 2 · CASOS RESUELTOS</a:t>
+              <a:rPr sz="1800" b="1">
+                <a:solidFill>
+                  <a:srgbClr val="F4B183"/>
+                </a:solidFill>
+                <a:latin typeface="Nunito Sans"/>
+              </a:rPr>
+              <a:t>BLOQUE 2</a:t>
             </a:r>
           </a:p>
         </p:txBody>
@@ -4000,7 +4050,7 @@
         </p:nvSpPr>
         <p:spPr>
           <a:xfrm>
-            <a:off x="640000" y="760000"/>
+            <a:off x="640000" y="2800000"/>
             <a:ext cx="10912000" cy="800000"/>
           </a:xfrm>
           <a:prstGeom prst="rect">
@@ -4016,222 +4066,17 @@
           <a:p>
             <a:pPr>
               <a:spcAft>
-                <a:spcPts val="1710"/>
+                <a:spcPts val="2160"/>
               </a:spcAft>
             </a:pPr>
             <a:r>
-              <a:rPr sz="3800" b="1">
-                <a:solidFill>
-                  <a:srgbClr val="1F2A44"/>
+              <a:rPr sz="4800" b="1">
+                <a:solidFill>
+                  <a:srgbClr val="FBF7EF"/>
                 </a:solidFill>
                 <a:latin typeface="Fredoka"/>
               </a:rPr>
-              <a:t>Caso 2 · El yogur</a:t>
-            </a:r>
-          </a:p>
-        </p:txBody>
-      </p:sp>
-      <p:sp>
-        <p:nvSpPr>
-          <p:cNvPr id="4" name="Rectangle 3"/>
-          <p:cNvSpPr/>
-          <p:nvPr/>
-        </p:nvSpPr>
-        <p:spPr>
-          <a:xfrm>
-            <a:off x="640000" y="1600000"/>
-            <a:ext cx="10912000" cy="1100000"/>
-          </a:xfrm>
-          <a:prstGeom prst="rect">
-            <a:avLst/>
-          </a:prstGeom>
-          <a:solidFill>
-            <a:srgbClr val="FFFFFF"/>
-          </a:solidFill>
-          <a:ln>
-            <a:noFill/>
-          </a:ln>
-        </p:spPr>
-        <p:style>
-          <a:lnRef idx="1">
-            <a:schemeClr val="accent1"/>
-          </a:lnRef>
-          <a:fillRef idx="3">
-            <a:schemeClr val="accent1"/>
-          </a:fillRef>
-          <a:effectRef idx="2">
-            <a:schemeClr val="accent1"/>
-          </a:effectRef>
-          <a:fontRef idx="minor">
-            <a:schemeClr val="lt1"/>
-          </a:fontRef>
-        </p:style>
-        <p:txBody>
-          <a:bodyPr rtlCol="0" anchor="ctr"/>
-          <a:lstStyle/>
-          <a:p>
-            <a:pPr algn="ctr"/>
-          </a:p>
-        </p:txBody>
-      </p:sp>
-      <p:sp>
-        <p:nvSpPr>
-          <p:cNvPr id="5" name="TextBox 4"/>
-          <p:cNvSpPr txBox="1"/>
-          <p:nvPr/>
-        </p:nvSpPr>
-        <p:spPr>
-          <a:xfrm>
-            <a:off x="840000" y="1650000"/>
-            <a:ext cx="10512000" cy="1000000"/>
-          </a:xfrm>
-          <a:prstGeom prst="rect">
-            <a:avLst/>
-          </a:prstGeom>
-          <a:noFill/>
-        </p:spPr>
-        <p:txBody>
-          <a:bodyPr wrap="square" anchor="ctr">
-            <a:spAutoFit/>
-          </a:bodyPr>
-          <a:lstStyle/>
-          <a:p>
-            <a:pPr>
-              <a:spcAft>
-                <a:spcPts val="1170"/>
-              </a:spcAft>
-            </a:pPr>
-            <a:r>
-              <a:rPr sz="2600" b="1">
-                <a:solidFill>
-                  <a:srgbClr val="1F2A44"/>
-                </a:solidFill>
-                <a:latin typeface="Nunito Sans"/>
-              </a:rPr>
-              <a:t>Un anuncio: «Ahora con un 30 % menos de azúcar». (Ejemplo inventado.)</a:t>
-            </a:r>
-          </a:p>
-        </p:txBody>
-      </p:sp>
-      <p:sp>
-        <p:nvSpPr>
-          <p:cNvPr id="6" name="TextBox 5"/>
-          <p:cNvSpPr txBox="1"/>
-          <p:nvPr/>
-        </p:nvSpPr>
-        <p:spPr>
-          <a:xfrm>
-            <a:off x="640000" y="2900000"/>
-            <a:ext cx="10912000" cy="3500000"/>
-          </a:xfrm>
-          <a:prstGeom prst="rect">
-            <a:avLst/>
-          </a:prstGeom>
-          <a:noFill/>
-        </p:spPr>
-        <p:txBody>
-          <a:bodyPr wrap="square">
-            <a:spAutoFit/>
-          </a:bodyPr>
-          <a:lstStyle/>
-          <a:p>
-            <a:pPr>
-              <a:spcAft>
-                <a:spcPts val="1080"/>
-              </a:spcAft>
-            </a:pPr>
-            <a:r>
-              <a:rPr sz="2400" b="1">
-                <a:solidFill>
-                  <a:srgbClr val="E8793A"/>
-                </a:solidFill>
-                <a:latin typeface="Nunito Sans"/>
-              </a:rPr>
-              <a:t>1. </a:t>
-            </a:r>
-            <a:r>
-              <a:rPr sz="2400" b="0">
-                <a:solidFill>
-                  <a:srgbClr val="1F2A44"/>
-                </a:solidFill>
-                <a:latin typeface="Nunito Sans"/>
-              </a:rPr>
-              <a:t>¿Un 30 % menos que qué? ¿Que el yogur de antes? ¿Que otra marca?</a:t>
-            </a:r>
-          </a:p>
-          <a:p>
-            <a:pPr>
-              <a:spcAft>
-                <a:spcPts val="1080"/>
-              </a:spcAft>
-            </a:pPr>
-            <a:r>
-              <a:rPr sz="2400" b="1">
-                <a:solidFill>
-                  <a:srgbClr val="E8793A"/>
-                </a:solidFill>
-                <a:latin typeface="Nunito Sans"/>
-              </a:rPr>
-              <a:t>2. </a:t>
-            </a:r>
-            <a:r>
-              <a:rPr sz="2400" b="0">
-                <a:solidFill>
-                  <a:srgbClr val="1F2A44"/>
-                </a:solidFill>
-                <a:latin typeface="Nunito Sans"/>
-              </a:rPr>
-              <a:t>Imagina que antes tenía 20 gramos de azúcar. Un 30 % menos son 14 gramos.</a:t>
-            </a:r>
-          </a:p>
-          <a:p>
-            <a:pPr>
-              <a:spcAft>
-                <a:spcPts val="1080"/>
-              </a:spcAft>
-            </a:pPr>
-            <a:r>
-              <a:rPr sz="2400" b="1">
-                <a:solidFill>
-                  <a:srgbClr val="E8793A"/>
-                </a:solidFill>
-                <a:latin typeface="Nunito Sans"/>
-              </a:rPr>
-              <a:t>3. </a:t>
-            </a:r>
-            <a:r>
-              <a:rPr sz="2400" b="0">
-                <a:solidFill>
-                  <a:srgbClr val="1F2A44"/>
-                </a:solidFill>
-                <a:latin typeface="Nunito Sans"/>
-              </a:rPr>
-              <a:t>14 gramos sigue siendo bastante azúcar para un yogur pequeño.</a:t>
-            </a:r>
-          </a:p>
-          <a:p>
-            <a:pPr>
-              <a:spcAft>
-                <a:spcPts val="1080"/>
-              </a:spcAft>
-            </a:pPr>
-            <a:r>
-              <a:rPr sz="2400" b="1">
-                <a:solidFill>
-                  <a:srgbClr val="E8793A"/>
-                </a:solidFill>
-                <a:latin typeface="Nunito Sans"/>
-              </a:rPr>
-              <a:t>4. </a:t>
-            </a:r>
-            <a:r>
-              <a:rPr sz="2400" b="0">
-                <a:solidFill>
-                  <a:srgbClr val="1F2A44"/>
-                </a:solidFill>
-                <a:latin typeface="Nunito Sans"/>
-              </a:rPr>
-              <a:t>Conclusión: «menos» no significa «poco». Hay que mirar la cifra de verdad en la etiqueta.</a:t>
+              <a:t>Un caso que lo mezcla todo</a:t>
             </a:r>
           </a:p>
         </p:txBody>
@@ -4296,7 +4141,7 @@
                 </a:solidFill>
                 <a:latin typeface="Nunito Sans"/>
               </a:rPr>
-              <a:t>BLOQUE 2 · CASOS RESUELTOS</a:t>
+              <a:t>BLOQUE 2 · UN CASO QUE LO MEZCLA TODO</a:t>
             </a:r>
           </a:p>
         </p:txBody>
@@ -4335,7 +4180,7 @@
                 </a:solidFill>
                 <a:latin typeface="Fredoka"/>
               </a:rPr>
-              <a:t>Caso 3 · Dos institutos</a:t>
+              <a:t>Caso · El mensaje del grupo</a:t>
             </a:r>
           </a:p>
         </p:txBody>
@@ -4417,7 +4262,7 @@
                 </a:solidFill>
                 <a:latin typeface="Nunito Sans"/>
               </a:rPr>
-              <a:t>En el instituto A hay 20 aprobados. En el instituto B hay 15. ¿Qué instituto lo hizo mejor? (Ejemplo inventado.)</a:t>
+              <a:t>En el grupo de clase: «¡¡INCREÍBLE!! Un famoso youtuber pillado robando en una tienda de Bilbao» y una foto borrosa. Sin enlace ni fecha.</a:t>
             </a:r>
           </a:p>
         </p:txBody>
@@ -4465,7 +4310,7 @@
                 </a:solidFill>
                 <a:latin typeface="Nunito Sans"/>
               </a:rPr>
-              <a:t>La cifra absoluta dice que A tiene más aprobados.</a:t>
+              <a:t>Titular clickbait: mayúsculas, «increíble», emoción fuerte.</a:t>
             </a:r>
           </a:p>
           <a:p>
@@ -4490,7 +4335,7 @@
                 </a:solidFill>
                 <a:latin typeface="Nunito Sans"/>
               </a:rPr>
-              <a:t>Pero pregunto el total: A tiene 40 alumnos y B tiene 20.</a:t>
+              <a:t>Fuente: no hay. ¿Quién lo dice? ¿Cómo lo sabe? Sin fecha: ingredientes de bulo.</a:t>
             </a:r>
           </a:p>
           <a:p>
@@ -4515,7 +4360,7 @@
                 </a:solidFill>
                 <a:latin typeface="Nunito Sans"/>
               </a:rPr>
-              <a:t>A: 20 de 40 = 50 %. B: 15 de 20 = 75 %.</a:t>
+              <a:t>Verifico: búsqueda inversa de la foto y lectura lateral. ¿Lo cuentan medios serios?</a:t>
             </a:r>
           </a:p>
           <a:p>
@@ -4540,7 +4385,7 @@
                 </a:solidFill>
                 <a:latin typeface="Nunito Sans"/>
               </a:rPr>
-              <a:t>Conclusión: B lo hizo mejor. Para comparar grupos de distinto tamaño hace falta la cifra relativa.</a:t>
+              <a:t>Conclusión: no lo reenvío hasta comprobarlo. Puede hacer daño a una persona real.</a:t>
             </a:r>
           </a:p>
         </p:txBody>
@@ -4605,7 +4450,7 @@
                 </a:solidFill>
                 <a:latin typeface="Nunito Sans"/>
               </a:rPr>
-              <a:t>CASO TRAMPA · BLOQUE 2 · CASOS RESUELTOS</a:t>
+              <a:t>CASO TRAMPA · BLOQUE 2 · UN CASO QUE LO MEZCLA TODO</a:t>
             </a:r>
           </a:p>
         </p:txBody>
@@ -4644,7 +4489,7 @@
                 </a:solidFill>
                 <a:latin typeface="Fredoka"/>
               </a:rPr>
-              <a:t>⚠ ¿Suben un 10 %?</a:t>
+              <a:t>⚠ La cuenta sin nombre</a:t>
             </a:r>
           </a:p>
         </p:txBody>
@@ -4726,7 +4571,7 @@
                 </a:solidFill>
                 <a:latin typeface="Nunito Sans"/>
               </a:rPr>
-              <a:t>En un instituto, los aprobados de inglés pasan del 40 % al 50 %. Titular: «¡Los aprobados suben un 10 %!». (Ejemplo inventado.)</a:t>
+              <a:t>Una cuenta sin nombre avisa en redes: «Accidente en la autopista, todo cortado». Una hora después, los medios serios lo confirman. (Ejemplo inventado.)</a:t>
             </a:r>
           </a:p>
         </p:txBody>
@@ -4774,7 +4619,7 @@
                 </a:solidFill>
                 <a:latin typeface="Nunito Sans"/>
               </a:rPr>
-              <a:t>50 menos 40 son 10. ¿Han subido un 10 %?</a:t>
+              <a:t>No tenía nombre ni fuente. ¿Era un bulo?</a:t>
             </a:r>
           </a:p>
           <a:p>
@@ -4799,25 +4644,7 @@
                 </a:solidFill>
                 <a:latin typeface="Nunito Sans"/>
               </a:rPr>
-              <a:t>Del 40 % al 50 % hay 10 </a:t>
-            </a:r>
-            <a:r>
-              <a:rPr sz="2400" b="1">
-                <a:solidFill>
-                  <a:srgbClr val="1F2A44"/>
-                </a:solidFill>
-                <a:latin typeface="Nunito Sans"/>
-              </a:rPr>
-              <a:t>puntos</a:t>
-            </a:r>
-            <a:r>
-              <a:rPr sz="2400" b="0">
-                <a:solidFill>
-                  <a:srgbClr val="1F2A44"/>
-                </a:solidFill>
-                <a:latin typeface="Nunito Sans"/>
-              </a:rPr>
-              <a:t>: es la resta de los dos porcentajes.</a:t>
+              <a:t>Sin nombre ni fuente, hice bien en no creérmelo del todo.</a:t>
             </a:r>
           </a:p>
           <a:p>
@@ -4842,7 +4669,7 @@
                 </a:solidFill>
                 <a:latin typeface="Nunito Sans"/>
               </a:rPr>
-              <a:t>Pero en proporción: 10 más sobre 40 es la cuarta parte. Los aprobados han subido un 25 %.</a:t>
+              <a:t>Pero una fuente anónima puede acertar: quizá alguien lo estaba viendo.</a:t>
             </a:r>
           </a:p>
           <a:p>
@@ -4867,7 +4694,7 @@
                 </a:solidFill>
                 <a:latin typeface="Nunito Sans"/>
               </a:rPr>
-              <a:t>Las dos cifras son verdad, pero dicen cosas distintas. El titular las mezcla.</a:t>
+              <a:t>«Sin nombre» no quiere decir «falso»: quiere decir «sin comprobar».</a:t>
             </a:r>
           </a:p>
           <a:p>
@@ -4892,7 +4719,7 @@
                 </a:solidFill>
                 <a:latin typeface="Nunito Sans"/>
               </a:rPr>
-              <a:t>Conclusión: subir 10 puntos no es subir un 10 %. Pregunto: ¿puntos o por ciento?</a:t>
+              <a:t>Conclusión: las señales no dicen si algo es verdad; dicen cuánto tengo que comprobar antes de creerlo.</a:t>
             </a:r>
           </a:p>
         </p:txBody>
@@ -5148,7 +4975,7 @@
                 </a:solidFill>
                 <a:latin typeface="Nunito Sans"/>
               </a:rPr>
-              <a:t>Un porcentaje dice cuántos hay de cada 100, y siempre es un porcentaje de algo.</a:t>
+              <a:t>Ninguna fuente es infalible: mira quién lo dice, cómo lo sabe y qué gana.</a:t>
             </a:r>
           </a:p>
           <a:p>
@@ -5173,7 +5000,7 @@
                 </a:solidFill>
                 <a:latin typeface="Nunito Sans"/>
               </a:rPr>
-              <a:t>«El doble» de casi nada sigue siendo casi nada: pregunta «¿de cuántos?».</a:t>
+              <a:t>El clickbait y los bulos usan la emoción para que hagas clic y compartas.</a:t>
             </a:r>
           </a:p>
           <a:p>
@@ -5198,7 +5025,7 @@
                 </a:solidFill>
                 <a:latin typeface="Nunito Sans"/>
               </a:rPr>
-              <a:t>No confundas puntos con por ciento: del 40 % al 50 % son 10 puntos, un 25 % más.</a:t>
+              <a:t>Para verificar: lectura lateral, fecha y origen de la imagen; si no encuentras nada, espera.</a:t>
             </a:r>
           </a:p>
         </p:txBody>
@@ -5263,149 +5090,6 @@
                 </a:solidFill>
                 <a:latin typeface="Nunito Sans"/>
               </a:rPr>
-              <a:t>VÍDEO</a:t>
-            </a:r>
-          </a:p>
-        </p:txBody>
-      </p:sp>
-      <p:sp>
-        <p:nvSpPr>
-          <p:cNvPr id="3" name="TextBox 2"/>
-          <p:cNvSpPr txBox="1"/>
-          <p:nvPr/>
-        </p:nvSpPr>
-        <p:spPr>
-          <a:xfrm>
-            <a:off x="640000" y="760000"/>
-            <a:ext cx="10912000" cy="800000"/>
-          </a:xfrm>
-          <a:prstGeom prst="rect">
-            <a:avLst/>
-          </a:prstGeom>
-          <a:noFill/>
-        </p:spPr>
-        <p:txBody>
-          <a:bodyPr wrap="square">
-            <a:spAutoFit/>
-          </a:bodyPr>
-          <a:lstStyle/>
-          <a:p>
-            <a:pPr>
-              <a:spcAft>
-                <a:spcPts val="1620"/>
-              </a:spcAft>
-            </a:pPr>
-            <a:r>
-              <a:rPr sz="3600" b="1">
-                <a:solidFill>
-                  <a:srgbClr val="FBF7EF"/>
-                </a:solidFill>
-                <a:latin typeface="Fredoka"/>
-              </a:rPr>
-              <a:t>Cómo engañan los porcentajes en noticias y anuncios</a:t>
-            </a:r>
-          </a:p>
-        </p:txBody>
-      </p:sp>
-      <p:sp>
-        <p:nvSpPr>
-          <p:cNvPr id="4" name="TextBox 3"/>
-          <p:cNvSpPr txBox="1"/>
-          <p:nvPr/>
-        </p:nvSpPr>
-        <p:spPr>
-          <a:xfrm>
-            <a:off x="640000" y="2200000"/>
-            <a:ext cx="10912000" cy="2000000"/>
-          </a:xfrm>
-          <a:prstGeom prst="rect">
-            <a:avLst/>
-          </a:prstGeom>
-          <a:noFill/>
-        </p:spPr>
-        <p:txBody>
-          <a:bodyPr wrap="square">
-            <a:spAutoFit/>
-          </a:bodyPr>
-          <a:lstStyle/>
-          <a:p>
-            <a:pPr>
-              <a:spcAft>
-                <a:spcPts val="1080"/>
-              </a:spcAft>
-            </a:pPr>
-            <a:r>
-              <a:rPr sz="2400" b="0">
-                <a:solidFill>
-                  <a:srgbClr val="C9D3E6"/>
-                </a:solidFill>
-                <a:latin typeface="Nunito Sans"/>
-              </a:rPr>
-              <a:t>Ver más ejemplos de cifras que suenan grandes y en realidad son pequeñas.</a:t>
-            </a:r>
-          </a:p>
-        </p:txBody>
-      </p:sp>
-    </p:spTree>
-  </p:cSld>
-  <p:clrMapOvr>
-    <a:masterClrMapping/>
-  </p:clrMapOvr>
-</p:sld>
-</file>
-
-<file path=ppt/slides/slide17.xml><?xml version="1.0" encoding="utf-8"?>
-<p:sld xmlns:a="http://schemas.openxmlformats.org/drawingml/2006/main" xmlns:p="http://schemas.openxmlformats.org/presentationml/2006/main" xmlns:r="http://schemas.openxmlformats.org/officeDocument/2006/relationships">
-  <p:cSld>
-    <p:bg>
-      <p:bgPr>
-        <a:solidFill>
-          <a:srgbClr val="1F2A44"/>
-        </a:solidFill>
-        <a:effectLst/>
-      </p:bgPr>
-    </p:bg>
-    <p:spTree>
-      <p:nvGrpSpPr>
-        <p:cNvPr id="1" name=""/>
-        <p:cNvGrpSpPr/>
-        <p:nvPr/>
-      </p:nvGrpSpPr>
-      <p:grpSpPr/>
-      <p:sp>
-        <p:nvSpPr>
-          <p:cNvPr id="2" name="TextBox 1"/>
-          <p:cNvSpPr txBox="1"/>
-          <p:nvPr/>
-        </p:nvSpPr>
-        <p:spPr>
-          <a:xfrm>
-            <a:off x="640000" y="380000"/>
-            <a:ext cx="10912000" cy="420000"/>
-          </a:xfrm>
-          <a:prstGeom prst="rect">
-            <a:avLst/>
-          </a:prstGeom>
-          <a:noFill/>
-        </p:spPr>
-        <p:txBody>
-          <a:bodyPr wrap="square">
-            <a:spAutoFit/>
-          </a:bodyPr>
-          <a:lstStyle/>
-          <a:p>
-            <a:pPr>
-              <a:spcAft>
-                <a:spcPts val="630"/>
-              </a:spcAft>
-            </a:pPr>
-            <a:r>
-              <a:rPr sz="1400" b="1">
-                <a:solidFill>
-                  <a:srgbClr val="F4B183"/>
-                </a:solidFill>
-                <a:latin typeface="Nunito Sans"/>
-              </a:rPr>
               <a:t>AHORA, LA HOJA DEL DÍA</a:t>
             </a:r>
           </a:p>
@@ -5847,7 +5531,7 @@
                 </a:solidFill>
                 <a:latin typeface="Nunito Sans"/>
               </a:rPr>
-              <a:t>1.ª pasada: sin apuntes, con bolígrafo. 2.ª pasada: con los apuntes, en otro color. Marca «seguro» o «dudo» en cada respuesta.</a:t>
+              <a:t>Sin apuntes. Junto a cada respuesta, marca «seguro» o «dudo».</a:t>
             </a:r>
           </a:p>
         </p:txBody>
@@ -5999,7 +5683,7 @@
                 </a:solidFill>
                 <a:latin typeface="Nunito Sans"/>
               </a:rPr>
-              <a:t>El clickbait exagera o ______ información para que hagas clic.  (sesión 36)</a:t>
+              <a:t>Un ______ es un vídeo, audio o imagen hecho con inteligencia artificial.  (sesión 36)</a:t>
             </a:r>
           </a:p>
           <a:p>
@@ -6024,7 +5708,7 @@
                 </a:solidFill>
                 <a:latin typeface="Nunito Sans"/>
               </a:rPr>
-              <a:t>Para saber de dónde viene una imagen, hago una búsqueda ______.  (sesión 36)</a:t>
+              <a:t>Si una imagen te da mucha emoción, ______.  (sesión 36)</a:t>
             </a:r>
           </a:p>
           <a:p>
@@ -6049,7 +5733,7 @@
                 </a:solidFill>
                 <a:latin typeface="Nunito Sans"/>
               </a:rPr>
-              <a:t>La autoridad por poder me pide que ______.  (sesión 25)</a:t>
+              <a:t>En la generalización apresurada falla esta pregunta de una buena razón: ¿es ______?  (sesión 25)</a:t>
             </a:r>
           </a:p>
         </p:txBody>
@@ -6201,7 +5885,7 @@
                 </a:solidFill>
                 <a:latin typeface="Nunito Sans"/>
               </a:rPr>
-              <a:t>El clickbait exagera o </a:t>
+              <a:t>Un </a:t>
             </a:r>
             <a:r>
               <a:rPr sz="2600" b="1">
@@ -6210,7 +5894,7 @@
                 </a:solidFill>
                 <a:latin typeface="Nunito Sans"/>
               </a:rPr>
-              <a:t>esconde</a:t>
+              <a:t>deepfake</a:t>
             </a:r>
             <a:r>
               <a:rPr sz="2600" b="0">
@@ -6219,7 +5903,7 @@
                 </a:solidFill>
                 <a:latin typeface="Nunito Sans"/>
               </a:rPr>
-              <a:t> información para que hagas clic.  (sesión 36)</a:t>
+              <a:t> es un vídeo, audio o imagen hecho con inteligencia artificial.  (sesión 36)</a:t>
             </a:r>
           </a:p>
           <a:p>
@@ -6244,7 +5928,7 @@
                 </a:solidFill>
                 <a:latin typeface="Nunito Sans"/>
               </a:rPr>
-              <a:t>Para saber de dónde viene una imagen, hago una búsqueda </a:t>
+              <a:t>Si una imagen te da mucha emoción, </a:t>
             </a:r>
             <a:r>
               <a:rPr sz="2600" b="1">
@@ -6253,7 +5937,7 @@
                 </a:solidFill>
                 <a:latin typeface="Nunito Sans"/>
               </a:rPr>
-              <a:t>inversa</a:t>
+              <a:t>sospecha</a:t>
             </a:r>
             <a:r>
               <a:rPr sz="2600" b="0">
@@ -6287,7 +5971,7 @@
                 </a:solidFill>
                 <a:latin typeface="Nunito Sans"/>
               </a:rPr>
-              <a:t>La autoridad por poder me pide que </a:t>
+              <a:t>En la generalización apresurada falla esta pregunta de una buena razón: ¿es </a:t>
             </a:r>
             <a:r>
               <a:rPr sz="2600" b="1">
@@ -6296,7 +5980,7 @@
                 </a:solidFill>
                 <a:latin typeface="Nunito Sans"/>
               </a:rPr>
-              <a:t>obedezca</a:t>
+              <a:t>suficiente</a:t>
             </a:r>
             <a:r>
               <a:rPr sz="2600" b="0">
@@ -6305,7 +5989,7 @@
                 </a:solidFill>
                 <a:latin typeface="Nunito Sans"/>
               </a:rPr>
-              <a:t>.  (sesión 25)</a:t>
+              <a:t>?  (sesión 25)</a:t>
             </a:r>
           </a:p>
         </p:txBody>
@@ -6452,7 +6136,7 @@
                 </a:solidFill>
                 <a:latin typeface="Nunito Sans"/>
               </a:rPr>
-              <a:t>«¡Los accidentes con patinete en nuestro barrio han subido un 100 %!» (Titular inventado.)</a:t>
+              <a:t>Cada día te llegan decenas de mensajes, titulares, fotos y vídeos.</a:t>
             </a:r>
           </a:p>
         </p:txBody>
@@ -6491,7 +6175,7 @@
                 </a:solidFill>
                 <a:latin typeface="Nunito Sans"/>
               </a:rPr>
-              <a:t>¿Es mucho o poco? ¿Qué número te falta para saberlo?</a:t>
+              <a:t>¿Cuál de las herramientas de esta unidad vas a usar más?</a:t>
             </a:r>
           </a:p>
         </p:txBody>
@@ -6595,7 +6279,7 @@
                 </a:solidFill>
                 <a:latin typeface="Fredoka"/>
               </a:rPr>
-              <a:t>Cifras sueltas</a:t>
+              <a:t>Repaso de la unidad</a:t>
             </a:r>
           </a:p>
         </p:txBody>
@@ -6660,7 +6344,7 @@
                 </a:solidFill>
                 <a:latin typeface="Nunito Sans"/>
               </a:rPr>
-              <a:t>BLOQUE 1 · CIFRAS SUELTAS</a:t>
+              <a:t>BLOQUE 1 · REPASO DE LA UNIDAD</a:t>
             </a:r>
           </a:p>
         </p:txBody>
@@ -6699,252 +6383,221 @@
                 </a:solidFill>
                 <a:latin typeface="Fredoka"/>
               </a:rPr>
-              <a:t>Porcentaje</a:t>
-            </a:r>
-          </a:p>
-        </p:txBody>
-      </p:sp>
-      <p:sp>
-        <p:nvSpPr>
-          <p:cNvPr id="4" name="Rectangle 3"/>
-          <p:cNvSpPr/>
+              <a:t>Tres preguntas a una fuente (sesión 32)</a:t>
+            </a:r>
+          </a:p>
+        </p:txBody>
+      </p:sp>
+      <p:graphicFrame>
+        <p:nvGraphicFramePr>
+          <p:cNvPr id="4" name="Table 3"/>
+          <p:cNvGraphicFramePr>
+            <a:graphicFrameLocks noGrp="1"/>
+          </p:cNvGraphicFramePr>
           <p:nvPr/>
-        </p:nvSpPr>
-        <p:spPr>
-          <a:xfrm>
-            <a:off x="640000" y="1650000"/>
-            <a:ext cx="10912000" cy="1150000"/>
-          </a:xfrm>
-          <a:prstGeom prst="rect">
-            <a:avLst/>
-          </a:prstGeom>
-          <a:solidFill>
-            <a:srgbClr val="EAF0F7"/>
-          </a:solidFill>
-          <a:ln>
-            <a:noFill/>
-          </a:ln>
-        </p:spPr>
-        <p:style>
-          <a:lnRef idx="1">
-            <a:schemeClr val="accent1"/>
-          </a:lnRef>
-          <a:fillRef idx="3">
-            <a:schemeClr val="accent1"/>
-          </a:fillRef>
-          <a:effectRef idx="2">
-            <a:schemeClr val="accent1"/>
-          </a:effectRef>
-          <a:fontRef idx="minor">
-            <a:schemeClr val="lt1"/>
-          </a:fontRef>
-        </p:style>
-        <p:txBody>
-          <a:bodyPr rtlCol="0" anchor="ctr"/>
-          <a:lstStyle/>
-          <a:p>
-            <a:pPr algn="ctr"/>
-          </a:p>
-        </p:txBody>
-      </p:sp>
-      <p:sp>
-        <p:nvSpPr>
-          <p:cNvPr id="5" name="TextBox 4"/>
-          <p:cNvSpPr txBox="1"/>
-          <p:nvPr/>
-        </p:nvSpPr>
-        <p:spPr>
-          <a:xfrm>
-            <a:off x="840000" y="1730000"/>
-            <a:ext cx="10512000" cy="1000000"/>
-          </a:xfrm>
-          <a:prstGeom prst="rect">
-            <a:avLst/>
-          </a:prstGeom>
-          <a:noFill/>
-        </p:spPr>
-        <p:txBody>
-          <a:bodyPr wrap="square" anchor="ctr">
-            <a:spAutoFit/>
-          </a:bodyPr>
-          <a:lstStyle/>
-          <a:p>
-            <a:pPr>
-              <a:spcAft>
-                <a:spcPts val="1260"/>
-              </a:spcAft>
-            </a:pPr>
-            <a:r>
-              <a:rPr sz="2800" b="1">
-                <a:solidFill>
-                  <a:srgbClr val="1F2A44"/>
-                </a:solidFill>
-                <a:latin typeface="Nunito Sans"/>
-              </a:rPr>
-              <a:t>Un porcentaje dice cuántos hay de cada 100. El 25 % significa 25 de cada 100.</a:t>
-            </a:r>
-          </a:p>
-        </p:txBody>
-      </p:sp>
-      <p:sp>
-        <p:nvSpPr>
-          <p:cNvPr id="6" name="TextBox 5"/>
-          <p:cNvSpPr txBox="1"/>
-          <p:nvPr/>
-        </p:nvSpPr>
-        <p:spPr>
-          <a:xfrm>
-            <a:off x="640000" y="3000000"/>
-            <a:ext cx="10912000" cy="3458000"/>
-          </a:xfrm>
-          <a:prstGeom prst="rect">
-            <a:avLst/>
-          </a:prstGeom>
-          <a:noFill/>
-        </p:spPr>
-        <p:txBody>
-          <a:bodyPr wrap="square">
-            <a:spAutoFit/>
-          </a:bodyPr>
-          <a:lstStyle/>
-          <a:p>
-            <a:pPr>
-              <a:spcAft>
-                <a:spcPts val="1260"/>
-              </a:spcAft>
-            </a:pPr>
-            <a:r>
-              <a:rPr sz="2800" b="1">
-                <a:solidFill>
-                  <a:srgbClr val="E8793A"/>
-                </a:solidFill>
-                <a:latin typeface="Nunito Sans"/>
-              </a:rPr>
-              <a:t>• </a:t>
-            </a:r>
-            <a:r>
-              <a:rPr sz="2800" b="1">
-                <a:solidFill>
-                  <a:srgbClr val="1F2A44"/>
-                </a:solidFill>
-                <a:latin typeface="Nunito Sans"/>
-              </a:rPr>
-              <a:t>50 %</a:t>
-            </a:r>
-            <a:r>
-              <a:rPr sz="2800" b="0">
-                <a:solidFill>
-                  <a:srgbClr val="1F2A44"/>
-                </a:solidFill>
-                <a:latin typeface="Nunito Sans"/>
-              </a:rPr>
-              <a:t> = la mitad</a:t>
-            </a:r>
-          </a:p>
-          <a:p>
-            <a:pPr>
-              <a:spcAft>
-                <a:spcPts val="1260"/>
-              </a:spcAft>
-            </a:pPr>
-            <a:r>
-              <a:rPr sz="2800" b="1">
-                <a:solidFill>
-                  <a:srgbClr val="E8793A"/>
-                </a:solidFill>
-                <a:latin typeface="Nunito Sans"/>
-              </a:rPr>
-              <a:t>• </a:t>
-            </a:r>
-            <a:r>
-              <a:rPr sz="2800" b="1">
-                <a:solidFill>
-                  <a:srgbClr val="1F2A44"/>
-                </a:solidFill>
-                <a:latin typeface="Nunito Sans"/>
-              </a:rPr>
-              <a:t>25 %</a:t>
-            </a:r>
-            <a:r>
-              <a:rPr sz="2800" b="0">
-                <a:solidFill>
-                  <a:srgbClr val="1F2A44"/>
-                </a:solidFill>
-                <a:latin typeface="Nunito Sans"/>
-              </a:rPr>
-              <a:t> = la cuarta parte</a:t>
-            </a:r>
-          </a:p>
-          <a:p>
-            <a:pPr>
-              <a:spcAft>
-                <a:spcPts val="1260"/>
-              </a:spcAft>
-            </a:pPr>
-            <a:r>
-              <a:rPr sz="2800" b="1">
-                <a:solidFill>
-                  <a:srgbClr val="E8793A"/>
-                </a:solidFill>
-                <a:latin typeface="Nunito Sans"/>
-              </a:rPr>
-              <a:t>• </a:t>
-            </a:r>
-            <a:r>
-              <a:rPr sz="2800" b="1">
-                <a:solidFill>
-                  <a:srgbClr val="1F2A44"/>
-                </a:solidFill>
-                <a:latin typeface="Nunito Sans"/>
-              </a:rPr>
-              <a:t>100 %</a:t>
-            </a:r>
-            <a:r>
-              <a:rPr sz="2800" b="0">
-                <a:solidFill>
-                  <a:srgbClr val="1F2A44"/>
-                </a:solidFill>
-                <a:latin typeface="Nunito Sans"/>
-              </a:rPr>
-              <a:t> = todos</a:t>
-            </a:r>
-          </a:p>
-          <a:p>
-            <a:pPr>
-              <a:spcAft>
-                <a:spcPts val="1260"/>
-              </a:spcAft>
-            </a:pPr>
-            <a:r>
-              <a:rPr sz="2800" b="1">
-                <a:solidFill>
-                  <a:srgbClr val="E8793A"/>
-                </a:solidFill>
-                <a:latin typeface="Nunito Sans"/>
-              </a:rPr>
-              <a:t>• </a:t>
-            </a:r>
-            <a:r>
-              <a:rPr sz="2800" b="0">
-                <a:solidFill>
-                  <a:srgbClr val="1F2A44"/>
-                </a:solidFill>
-                <a:latin typeface="Nunito Sans"/>
-              </a:rPr>
-              <a:t>Siempre es un porcentaje </a:t>
-            </a:r>
-            <a:r>
-              <a:rPr sz="2800" b="1">
-                <a:solidFill>
-                  <a:srgbClr val="1F2A44"/>
-                </a:solidFill>
-                <a:latin typeface="Nunito Sans"/>
-              </a:rPr>
-              <a:t>de algo</a:t>
-            </a:r>
-          </a:p>
-        </p:txBody>
-      </p:sp>
+        </p:nvGraphicFramePr>
+        <p:xfrm>
+          <a:off x="640000" y="1700000"/>
+          <a:ext cx="10912000" cy="2400000"/>
+        </p:xfrm>
+        <a:graphic>
+          <a:graphicData uri="http://schemas.openxmlformats.org/drawingml/2006/table">
+            <a:tbl>
+              <a:tblPr firstRow="1" bandRow="1">
+                <a:tableStyleId>{5C22544A-7EE6-4342-B048-85BDC9FD1C3A}</a:tableStyleId>
+              </a:tblPr>
+              <a:tblGrid>
+                <a:gridCol w="5456000"/>
+                <a:gridCol w="5456000"/>
+              </a:tblGrid>
+              <a:tr h="600000">
+                <a:tc>
+                  <a:txBody>
+                    <a:bodyPr/>
+                    <a:lstStyle/>
+                    <a:p>
+                      <a:r>
+                        <a:rPr sz="2000" b="1">
+                          <a:solidFill>
+                            <a:srgbClr val="FBF7EF"/>
+                          </a:solidFill>
+                          <a:latin typeface="Fredoka"/>
+                        </a:rPr>
+                        <a:t>Pregunta</a:t>
+                      </a:r>
+                    </a:p>
+                  </a:txBody>
+                  <a:tcPr>
+                    <a:solidFill>
+                      <a:srgbClr val="1F2A44"/>
+                    </a:solidFill>
+                  </a:tcPr>
+                </a:tc>
+                <a:tc>
+                  <a:txBody>
+                    <a:bodyPr/>
+                    <a:lstStyle/>
+                    <a:p>
+                      <a:r>
+                        <a:rPr sz="2000" b="1">
+                          <a:solidFill>
+                            <a:srgbClr val="FBF7EF"/>
+                          </a:solidFill>
+                          <a:latin typeface="Fredoka"/>
+                        </a:rPr>
+                        <a:t>Qué miro</a:t>
+                      </a:r>
+                    </a:p>
+                  </a:txBody>
+                  <a:tcPr>
+                    <a:solidFill>
+                      <a:srgbClr val="1F2A44"/>
+                    </a:solidFill>
+                  </a:tcPr>
+                </a:tc>
+              </a:tr>
+              <a:tr h="600000">
+                <a:tc>
+                  <a:txBody>
+                    <a:bodyPr/>
+                    <a:lstStyle/>
+                    <a:p>
+                      <a:r>
+                        <a:rPr sz="2000" b="1">
+                          <a:solidFill>
+                            <a:srgbClr val="1F2A44"/>
+                          </a:solidFill>
+                          <a:latin typeface="Nunito Sans"/>
+                        </a:rPr>
+                        <a:t>¿Quién lo dice?</a:t>
+                      </a:r>
+                    </a:p>
+                  </a:txBody>
+                  <a:tcPr>
+                    <a:solidFill>
+                      <a:srgbClr val="FFFFFF"/>
+                    </a:solidFill>
+                  </a:tcPr>
+                </a:tc>
+                <a:tc>
+                  <a:txBody>
+                    <a:bodyPr/>
+                    <a:lstStyle/>
+                    <a:p>
+                      <a:r>
+                        <a:rPr sz="2000" b="0">
+                          <a:solidFill>
+                            <a:srgbClr val="1F2A44"/>
+                          </a:solidFill>
+                          <a:latin typeface="Nunito Sans"/>
+                        </a:rPr>
+                        <a:t>¿Tiene nombre? ¿Sabe del tema?</a:t>
+                      </a:r>
+                    </a:p>
+                  </a:txBody>
+                  <a:tcPr>
+                    <a:solidFill>
+                      <a:srgbClr val="FFFFFF"/>
+                    </a:solidFill>
+                  </a:tcPr>
+                </a:tc>
+              </a:tr>
+              <a:tr h="600000">
+                <a:tc>
+                  <a:txBody>
+                    <a:bodyPr/>
+                    <a:lstStyle/>
+                    <a:p>
+                      <a:r>
+                        <a:rPr sz="2000" b="1">
+                          <a:solidFill>
+                            <a:srgbClr val="1F2A44"/>
+                          </a:solidFill>
+                          <a:latin typeface="Nunito Sans"/>
+                        </a:rPr>
+                        <a:t>¿Cómo lo sabe?</a:t>
+                      </a:r>
+                    </a:p>
+                  </a:txBody>
+                  <a:tcPr>
+                    <a:solidFill>
+                      <a:srgbClr val="EAF0F7"/>
+                    </a:solidFill>
+                  </a:tcPr>
+                </a:tc>
+                <a:tc>
+                  <a:txBody>
+                    <a:bodyPr/>
+                    <a:lstStyle/>
+                    <a:p>
+                      <a:r>
+                        <a:rPr sz="2000" b="0">
+                          <a:solidFill>
+                            <a:srgbClr val="1F2A44"/>
+                          </a:solidFill>
+                          <a:latin typeface="Nunito Sans"/>
+                        </a:rPr>
+                        <a:t>¿Lo vio, lo midió o lo copió?</a:t>
+                      </a:r>
+                    </a:p>
+                  </a:txBody>
+                  <a:tcPr>
+                    <a:solidFill>
+                      <a:srgbClr val="EAF0F7"/>
+                    </a:solidFill>
+                  </a:tcPr>
+                </a:tc>
+              </a:tr>
+              <a:tr h="600000">
+                <a:tc>
+                  <a:txBody>
+                    <a:bodyPr/>
+                    <a:lstStyle/>
+                    <a:p>
+                      <a:r>
+                        <a:rPr sz="2000" b="1">
+                          <a:solidFill>
+                            <a:srgbClr val="1F2A44"/>
+                          </a:solidFill>
+                          <a:latin typeface="Nunito Sans"/>
+                        </a:rPr>
+                        <a:t>¿Qué gana?</a:t>
+                      </a:r>
+                    </a:p>
+                  </a:txBody>
+                  <a:tcPr>
+                    <a:solidFill>
+                      <a:srgbClr val="FFFFFF"/>
+                    </a:solidFill>
+                  </a:tcPr>
+                </a:tc>
+                <a:tc>
+                  <a:txBody>
+                    <a:bodyPr/>
+                    <a:lstStyle/>
+                    <a:p>
+                      <a:r>
+                        <a:rPr sz="2000" b="0">
+                          <a:solidFill>
+                            <a:srgbClr val="1F2A44"/>
+                          </a:solidFill>
+                          <a:latin typeface="Nunito Sans"/>
+                        </a:rPr>
+                        <a:t>¿Dinero, visitas, votos, fama?</a:t>
+                      </a:r>
+                    </a:p>
+                  </a:txBody>
+                  <a:tcPr>
+                    <a:solidFill>
+                      <a:srgbClr val="FFFFFF"/>
+                    </a:solidFill>
+                  </a:tcPr>
+                </a:tc>
+              </a:tr>
+            </a:tbl>
+          </a:graphicData>
+        </a:graphic>
+      </p:graphicFrame>
     </p:spTree>
   </p:cSld>
   <p:clrMapOvr>
@@ -7005,7 +6658,7 @@
                 </a:solidFill>
                 <a:latin typeface="Nunito Sans"/>
               </a:rPr>
-              <a:t>BLOQUE 1 · CIFRAS SUELTAS</a:t>
+              <a:t>BLOQUE 1 · REPASO DE LA UNIDAD</a:t>
             </a:r>
           </a:p>
         </p:txBody>
@@ -7044,57 +6697,14 @@
                 </a:solidFill>
                 <a:latin typeface="Fredoka"/>
               </a:rPr>
-              <a:t>Cifra absoluta y cifra relativa</a:t>
-            </a:r>
-          </a:p>
-        </p:txBody>
-      </p:sp>
-      <p:sp>
-        <p:nvSpPr>
-          <p:cNvPr id="4" name="Rectangle 3"/>
-          <p:cNvSpPr/>
-          <p:nvPr/>
-        </p:nvSpPr>
-        <p:spPr>
-          <a:xfrm>
-            <a:off x="640000" y="1650000"/>
-            <a:ext cx="10912000" cy="1150000"/>
-          </a:xfrm>
-          <a:prstGeom prst="rect">
-            <a:avLst/>
-          </a:prstGeom>
-          <a:solidFill>
-            <a:srgbClr val="EAF0F7"/>
-          </a:solidFill>
-          <a:ln>
-            <a:noFill/>
-          </a:ln>
-        </p:spPr>
-        <p:style>
-          <a:lnRef idx="1">
-            <a:schemeClr val="accent1"/>
-          </a:lnRef>
-          <a:fillRef idx="3">
-            <a:schemeClr val="accent1"/>
-          </a:fillRef>
-          <a:effectRef idx="2">
-            <a:schemeClr val="accent1"/>
-          </a:effectRef>
-          <a:fontRef idx="minor">
-            <a:schemeClr val="lt1"/>
-          </a:fontRef>
-        </p:style>
-        <p:txBody>
-          <a:bodyPr rtlCol="0" anchor="ctr"/>
-          <a:lstStyle/>
-          <a:p>
-            <a:pPr algn="ctr"/>
-          </a:p>
-        </p:txBody>
-      </p:sp>
-      <p:sp>
-        <p:nvSpPr>
-          <p:cNvPr id="5" name="TextBox 4"/>
+              <a:t>Titulares y clickbait (sesión 33)</a:t>
+            </a:r>
+          </a:p>
+        </p:txBody>
+      </p:sp>
+      <p:sp>
+        <p:nvSpPr>
+          <p:cNvPr id="4" name="TextBox 3"/>
           <p:cNvSpPr txBox="1"/>
           <p:nvPr/>
         </p:nvSpPr>
@@ -7110,6 +6720,45 @@
         </p:spPr>
         <p:txBody>
           <a:bodyPr wrap="square" anchor="ctr">
+            <a:spAutoFit/>
+          </a:bodyPr>
+          <a:lstStyle/>
+          <a:p>
+            <a:pPr>
+              <a:spcAft>
+                <a:spcPts val="1080"/>
+              </a:spcAft>
+            </a:pPr>
+            <a:r>
+              <a:rPr sz="2400" b="0">
+                <a:solidFill>
+                  <a:srgbClr val="1F2A44"/>
+                </a:solidFill>
+                <a:latin typeface="Nunito Sans"/>
+              </a:rPr>
+              <a:t>El clickbait exagera o esconde información para que hagas clic.</a:t>
+            </a:r>
+          </a:p>
+        </p:txBody>
+      </p:sp>
+      <p:sp>
+        <p:nvSpPr>
+          <p:cNvPr id="5" name="TextBox 4"/>
+          <p:cNvSpPr txBox="1"/>
+          <p:nvPr/>
+        </p:nvSpPr>
+        <p:spPr>
+          <a:xfrm>
+            <a:off x="640000" y="3000000"/>
+            <a:ext cx="10912000" cy="3458000"/>
+          </a:xfrm>
+          <a:prstGeom prst="rect">
+            <a:avLst/>
+          </a:prstGeom>
+          <a:noFill/>
+        </p:spPr>
+        <p:txBody>
+          <a:bodyPr wrap="square">
             <a:spAutoFit/>
           </a:bodyPr>
           <a:lstStyle/>
@@ -7122,36 +6771,22 @@
             <a:r>
               <a:rPr sz="2800" b="1">
                 <a:solidFill>
+                  <a:srgbClr val="E8793A"/>
+                </a:solidFill>
+                <a:latin typeface="Nunito Sans"/>
+              </a:rPr>
+              <a:t>• </a:t>
+            </a:r>
+            <a:r>
+              <a:rPr sz="2800" b="0">
+                <a:solidFill>
                   <a:srgbClr val="1F2A44"/>
                 </a:solidFill>
                 <a:latin typeface="Nunito Sans"/>
               </a:rPr>
-              <a:t>La cifra absoluta dice cuántos hay. La cifra relativa compara con el total, por ejemplo con un porcentaje.</a:t>
-            </a:r>
-          </a:p>
-        </p:txBody>
-      </p:sp>
-      <p:sp>
-        <p:nvSpPr>
-          <p:cNvPr id="6" name="TextBox 5"/>
-          <p:cNvSpPr txBox="1"/>
-          <p:nvPr/>
-        </p:nvSpPr>
-        <p:spPr>
-          <a:xfrm>
-            <a:off x="640000" y="3000000"/>
-            <a:ext cx="10912000" cy="3458000"/>
-          </a:xfrm>
-          <a:prstGeom prst="rect">
-            <a:avLst/>
-          </a:prstGeom>
-          <a:noFill/>
-        </p:spPr>
-        <p:txBody>
-          <a:bodyPr wrap="square">
-            <a:spAutoFit/>
-          </a:bodyPr>
-          <a:lstStyle/>
+              <a:t>Esconde el dato: «No creerás lo que pasó»</a:t>
+            </a:r>
+          </a:p>
           <a:p>
             <a:pPr>
               <a:spcAft>
@@ -7168,22 +6803,13 @@
               <a:t>• </a:t>
             </a:r>
             <a:r>
-              <a:rPr sz="2800" b="1">
+              <a:rPr sz="2800" b="0">
                 <a:solidFill>
                   <a:srgbClr val="1F2A44"/>
                 </a:solidFill>
                 <a:latin typeface="Nunito Sans"/>
               </a:rPr>
-              <a:t>Absoluta:</a:t>
-            </a:r>
-            <a:r>
-              <a:rPr sz="2800" b="0">
-                <a:solidFill>
-                  <a:srgbClr val="1F2A44"/>
-                </a:solidFill>
-                <a:latin typeface="Nunito Sans"/>
-              </a:rPr>
-              <a:t> aprobaron 30 alumnos</a:t>
+              <a:t>Exagera: «increíble», «brutal»; mayúsculas y exclamaciones</a:t>
             </a:r>
           </a:p>
           <a:p>
@@ -7202,22 +6828,13 @@
               <a:t>• </a:t>
             </a:r>
             <a:r>
-              <a:rPr sz="2800" b="1">
+              <a:rPr sz="2800" b="0">
                 <a:solidFill>
                   <a:srgbClr val="1F2A44"/>
                 </a:solidFill>
                 <a:latin typeface="Nunito Sans"/>
               </a:rPr>
-              <a:t>Relativa:</a:t>
-            </a:r>
-            <a:r>
-              <a:rPr sz="2800" b="0">
-                <a:solidFill>
-                  <a:srgbClr val="1F2A44"/>
-                </a:solidFill>
-                <a:latin typeface="Nunito Sans"/>
-              </a:rPr>
-              <a:t> aprobó el 60 % (30 de 50)</a:t>
+              <a:t>Pero un titular llamativo no siempre es clickbait</a:t>
             </a:r>
           </a:p>
           <a:p>
@@ -7242,7 +6859,7 @@
                 </a:solidFill>
                 <a:latin typeface="Nunito Sans"/>
               </a:rPr>
-              <a:t>Hacen falta las dos para entender bien</a:t>
+              <a:t>Antes de compartir, lee la noticia entera</a:t>
             </a:r>
           </a:p>
         </p:txBody>
@@ -7307,7 +6924,7 @@
                 </a:solidFill>
                 <a:latin typeface="Nunito Sans"/>
               </a:rPr>
-              <a:t>BLOQUE 1 · CIFRAS SUELTAS</a:t>
+              <a:t>BLOQUE 1 · REPASO DE LA UNIDAD</a:t>
             </a:r>
           </a:p>
         </p:txBody>
@@ -7346,7 +6963,273 @@
                 </a:solidFill>
                 <a:latin typeface="Fredoka"/>
               </a:rPr>
-              <a:t>«El doble» de casi nada (ejemplos inventados)</a:t>
+              <a:t>Bulos (sesión 34)</a:t>
+            </a:r>
+          </a:p>
+        </p:txBody>
+      </p:sp>
+      <p:sp>
+        <p:nvSpPr>
+          <p:cNvPr id="4" name="TextBox 3"/>
+          <p:cNvSpPr txBox="1"/>
+          <p:nvPr/>
+        </p:nvSpPr>
+        <p:spPr>
+          <a:xfrm>
+            <a:off x="840000" y="1730000"/>
+            <a:ext cx="10512000" cy="1000000"/>
+          </a:xfrm>
+          <a:prstGeom prst="rect">
+            <a:avLst/>
+          </a:prstGeom>
+          <a:noFill/>
+        </p:spPr>
+        <p:txBody>
+          <a:bodyPr wrap="square" anchor="ctr">
+            <a:spAutoFit/>
+          </a:bodyPr>
+          <a:lstStyle/>
+          <a:p>
+            <a:pPr>
+              <a:spcAft>
+                <a:spcPts val="1080"/>
+              </a:spcAft>
+            </a:pPr>
+            <a:r>
+              <a:rPr sz="2400" b="0">
+                <a:solidFill>
+                  <a:srgbClr val="1F2A44"/>
+                </a:solidFill>
+                <a:latin typeface="Nunito Sans"/>
+              </a:rPr>
+              <a:t>Un bulo es una mentira inventada que se hace pasar por noticia.</a:t>
+            </a:r>
+          </a:p>
+        </p:txBody>
+      </p:sp>
+      <p:sp>
+        <p:nvSpPr>
+          <p:cNvPr id="5" name="TextBox 4"/>
+          <p:cNvSpPr txBox="1"/>
+          <p:nvPr/>
+        </p:nvSpPr>
+        <p:spPr>
+          <a:xfrm>
+            <a:off x="640000" y="3000000"/>
+            <a:ext cx="10912000" cy="3458000"/>
+          </a:xfrm>
+          <a:prstGeom prst="rect">
+            <a:avLst/>
+          </a:prstGeom>
+          <a:noFill/>
+        </p:spPr>
+        <p:txBody>
+          <a:bodyPr wrap="square">
+            <a:spAutoFit/>
+          </a:bodyPr>
+          <a:lstStyle/>
+          <a:p>
+            <a:pPr>
+              <a:spcAft>
+                <a:spcPts val="1260"/>
+              </a:spcAft>
+            </a:pPr>
+            <a:r>
+              <a:rPr sz="2800" b="1">
+                <a:solidFill>
+                  <a:srgbClr val="E8793A"/>
+                </a:solidFill>
+                <a:latin typeface="Nunito Sans"/>
+              </a:rPr>
+              <a:t>• </a:t>
+            </a:r>
+            <a:r>
+              <a:rPr sz="2800" b="0">
+                <a:solidFill>
+                  <a:srgbClr val="1F2A44"/>
+                </a:solidFill>
+                <a:latin typeface="Nunito Sans"/>
+              </a:rPr>
+              <a:t>Ingredientes: urgencia, emoción fuerte, fuente vaga, sin fecha</a:t>
+            </a:r>
+          </a:p>
+          <a:p>
+            <a:pPr>
+              <a:spcAft>
+                <a:spcPts val="1260"/>
+              </a:spcAft>
+            </a:pPr>
+            <a:r>
+              <a:rPr sz="2800" b="1">
+                <a:solidFill>
+                  <a:srgbClr val="E8793A"/>
+                </a:solidFill>
+                <a:latin typeface="Nunito Sans"/>
+              </a:rPr>
+              <a:t>• </a:t>
+            </a:r>
+            <a:r>
+              <a:rPr sz="2800" b="0">
+                <a:solidFill>
+                  <a:srgbClr val="1F2A44"/>
+                </a:solidFill>
+                <a:latin typeface="Nunito Sans"/>
+              </a:rPr>
+              <a:t>Son señales para sospechar, no pruebas</a:t>
+            </a:r>
+          </a:p>
+          <a:p>
+            <a:pPr>
+              <a:spcAft>
+                <a:spcPts val="1260"/>
+              </a:spcAft>
+            </a:pPr>
+            <a:r>
+              <a:rPr sz="2800" b="1">
+                <a:solidFill>
+                  <a:srgbClr val="E8793A"/>
+                </a:solidFill>
+                <a:latin typeface="Nunito Sans"/>
+              </a:rPr>
+              <a:t>• </a:t>
+            </a:r>
+            <a:r>
+              <a:rPr sz="2800" b="0">
+                <a:solidFill>
+                  <a:srgbClr val="1F2A44"/>
+                </a:solidFill>
+                <a:latin typeface="Nunito Sans"/>
+              </a:rPr>
+              <a:t>Lo compartimos porque nos emociona y viene de alguien de confianza</a:t>
+            </a:r>
+          </a:p>
+          <a:p>
+            <a:pPr>
+              <a:spcAft>
+                <a:spcPts val="1260"/>
+              </a:spcAft>
+            </a:pPr>
+            <a:r>
+              <a:rPr sz="2800" b="1">
+                <a:solidFill>
+                  <a:srgbClr val="E8793A"/>
+                </a:solidFill>
+                <a:latin typeface="Nunito Sans"/>
+              </a:rPr>
+              <a:t>• </a:t>
+            </a:r>
+            <a:r>
+              <a:rPr sz="2800" b="0">
+                <a:solidFill>
+                  <a:srgbClr val="1F2A44"/>
+                </a:solidFill>
+                <a:latin typeface="Nunito Sans"/>
+              </a:rPr>
+              <a:t>Una foto verdadera con un contexto falso también es bulo</a:t>
+            </a:r>
+          </a:p>
+        </p:txBody>
+      </p:sp>
+    </p:spTree>
+  </p:cSld>
+  <p:clrMapOvr>
+    <a:masterClrMapping/>
+  </p:clrMapOvr>
+</p:sld>
+</file>
+
+<file path=ppt/slides/slide9.xml><?xml version="1.0" encoding="utf-8"?>
+<p:sld xmlns:a="http://schemas.openxmlformats.org/drawingml/2006/main" xmlns:p="http://schemas.openxmlformats.org/presentationml/2006/main" xmlns:r="http://schemas.openxmlformats.org/officeDocument/2006/relationships">
+  <p:cSld>
+    <p:bg>
+      <p:bgPr>
+        <a:solidFill>
+          <a:srgbClr val="FBF7EF"/>
+        </a:solidFill>
+        <a:effectLst/>
+      </p:bgPr>
+    </p:bg>
+    <p:spTree>
+      <p:nvGrpSpPr>
+        <p:cNvPr id="1" name=""/>
+        <p:cNvGrpSpPr/>
+        <p:nvPr/>
+      </p:nvGrpSpPr>
+      <p:grpSpPr/>
+      <p:sp>
+        <p:nvSpPr>
+          <p:cNvPr id="2" name="TextBox 1"/>
+          <p:cNvSpPr txBox="1"/>
+          <p:nvPr/>
+        </p:nvSpPr>
+        <p:spPr>
+          <a:xfrm>
+            <a:off x="640000" y="380000"/>
+            <a:ext cx="10912000" cy="420000"/>
+          </a:xfrm>
+          <a:prstGeom prst="rect">
+            <a:avLst/>
+          </a:prstGeom>
+          <a:noFill/>
+        </p:spPr>
+        <p:txBody>
+          <a:bodyPr wrap="square">
+            <a:spAutoFit/>
+          </a:bodyPr>
+          <a:lstStyle/>
+          <a:p>
+            <a:pPr>
+              <a:spcAft>
+                <a:spcPts val="630"/>
+              </a:spcAft>
+            </a:pPr>
+            <a:r>
+              <a:rPr sz="1400" b="1">
+                <a:solidFill>
+                  <a:srgbClr val="E8793A"/>
+                </a:solidFill>
+                <a:latin typeface="Nunito Sans"/>
+              </a:rPr>
+              <a:t>BLOQUE 1 · REPASO DE LA UNIDAD</a:t>
+            </a:r>
+          </a:p>
+        </p:txBody>
+      </p:sp>
+      <p:sp>
+        <p:nvSpPr>
+          <p:cNvPr id="3" name="TextBox 2"/>
+          <p:cNvSpPr txBox="1"/>
+          <p:nvPr/>
+        </p:nvSpPr>
+        <p:spPr>
+          <a:xfrm>
+            <a:off x="640000" y="760000"/>
+            <a:ext cx="10912000" cy="800000"/>
+          </a:xfrm>
+          <a:prstGeom prst="rect">
+            <a:avLst/>
+          </a:prstGeom>
+          <a:noFill/>
+        </p:spPr>
+        <p:txBody>
+          <a:bodyPr wrap="square">
+            <a:spAutoFit/>
+          </a:bodyPr>
+          <a:lstStyle/>
+          <a:p>
+            <a:pPr>
+              <a:spcAft>
+                <a:spcPts val="1710"/>
+              </a:spcAft>
+            </a:pPr>
+            <a:r>
+              <a:rPr sz="3800" b="1">
+                <a:solidFill>
+                  <a:srgbClr val="1F2A44"/>
+                </a:solidFill>
+                <a:latin typeface="Fredoka"/>
+              </a:rPr>
+              <a:t>Tres pasos para verificar (sesión 35)</a:t>
             </a:r>
           </a:p>
         </p:txBody>
@@ -7361,7 +7244,7 @@
         </p:nvGraphicFramePr>
         <p:xfrm>
           <a:off x="640000" y="1700000"/>
-          <a:ext cx="10912000" cy="2400000"/>
+          <a:ext cx="10912000" cy="3000000"/>
         </p:xfrm>
         <a:graphic>
           <a:graphicData uri="http://schemas.openxmlformats.org/drawingml/2006/table">
@@ -7370,9 +7253,8 @@
                 <a:tableStyleId>{5C22544A-7EE6-4342-B048-85BDC9FD1C3A}</a:tableStyleId>
               </a:tblPr>
               <a:tblGrid>
-                <a:gridCol w="3637333"/>
-                <a:gridCol w="3637333"/>
-                <a:gridCol w="3637334"/>
+                <a:gridCol w="5456000"/>
+                <a:gridCol w="5456000"/>
               </a:tblGrid>
               <a:tr h="600000">
                 <a:tc>
@@ -7387,7 +7269,7 @@
                           </a:solidFill>
                           <a:latin typeface="Fredoka"/>
                         </a:rPr>
-                        <a:t>Titular</a:t>
+                        <a:t>Paso</a:t>
                       </a:r>
                     </a:p>
                   </a:txBody>
@@ -7409,29 +7291,7 @@
                           </a:solidFill>
                           <a:latin typeface="Fredoka"/>
                         </a:rPr>
-                        <a:t>Antes → después</a:t>
-                      </a:r>
-                    </a:p>
-                  </a:txBody>
-                  <a:tcPr>
-                    <a:solidFill>
-                      <a:srgbClr val="1F2A44"/>
-                    </a:solidFill>
-                  </a:tcPr>
-                </a:tc>
-                <a:tc>
-                  <a:txBody>
-                    <a:bodyPr/>
-                    <a:lstStyle/>
-                    <a:p>
-                      <a:r>
-                        <a:rPr sz="2000" b="1">
-                          <a:solidFill>
-                            <a:srgbClr val="FBF7EF"/>
-                          </a:solidFill>
-                          <a:latin typeface="Fredoka"/>
-                        </a:rPr>
-                        <a:t>¿Mucho o poco?</a:t>
+                        <a:t>Qué hago</a:t>
                       </a:r>
                     </a:p>
                   </a:txBody>
@@ -7449,13 +7309,13 @@
                     <a:lstStyle/>
                     <a:p>
                       <a:r>
-                        <a:rPr sz="2000" b="0">
+                        <a:rPr sz="2000" b="1">
                           <a:solidFill>
                             <a:srgbClr val="1F2A44"/>
                           </a:solidFill>
                           <a:latin typeface="Nunito Sans"/>
                         </a:rPr>
-                        <a:t>«¡Suben un 100 %!»</a:t>
+                        <a:t>Lectura lateral</a:t>
                       </a:r>
                     </a:p>
                   </a:txBody>
@@ -7477,7 +7337,77 @@
                           </a:solidFill>
                           <a:latin typeface="Nunito Sans"/>
                         </a:rPr>
-                        <a:t>1 caso → 2 casos</a:t>
+                        <a:t>Salgo de la página y busco qué dicen otros</a:t>
+                      </a:r>
+                    </a:p>
+                  </a:txBody>
+                  <a:tcPr>
+                    <a:solidFill>
+                      <a:srgbClr val="FFFFFF"/>
+                    </a:solidFill>
+                  </a:tcPr>
+                </a:tc>
+              </a:tr>
+              <a:tr h="600000">
+                <a:tc>
+                  <a:txBody>
+                    <a:bodyPr/>
+                    <a:lstStyle/>
+                    <a:p>
+                      <a:r>
+                        <a:rPr sz="2000" b="1">
+                          <a:solidFill>
+                            <a:srgbClr val="1F2A44"/>
+                          </a:solidFill>
+                          <a:latin typeface="Nunito Sans"/>
+                        </a:rPr>
+                        <a:t>Fecha</a:t>
+                      </a:r>
+                    </a:p>
+                  </a:txBody>
+                  <a:tcPr>
+                    <a:solidFill>
+                      <a:srgbClr val="EAF0F7"/>
+                    </a:solidFill>
+                  </a:tcPr>
+                </a:tc>
+                <a:tc>
+                  <a:txBody>
+                    <a:bodyPr/>
+                    <a:lstStyle/>
+                    <a:p>
+                      <a:r>
+                        <a:rPr sz="2000" b="0">
+                          <a:solidFill>
+                            <a:srgbClr val="1F2A44"/>
+                          </a:solidFill>
+                          <a:latin typeface="Nunito Sans"/>
+                        </a:rPr>
+                        <a:t>Miro cuándo se publicó, no cuándo me llegó</a:t>
+                      </a:r>
+                    </a:p>
+                  </a:txBody>
+                  <a:tcPr>
+                    <a:solidFill>
+                      <a:srgbClr val="EAF0F7"/>
+                    </a:solidFill>
+                  </a:tcPr>
+                </a:tc>
+              </a:tr>
+              <a:tr h="600000">
+                <a:tc>
+                  <a:txBody>
+                    <a:bodyPr/>
+                    <a:lstStyle/>
+                    <a:p>
+                      <a:r>
+                        <a:rPr sz="2000" b="1">
+                          <a:solidFill>
+                            <a:srgbClr val="1F2A44"/>
+                          </a:solidFill>
+                          <a:latin typeface="Nunito Sans"/>
+                        </a:rPr>
+                        <a:t>Origen de la imagen</a:t>
                       </a:r>
                     </a:p>
                   </a:txBody>
@@ -7499,7 +7429,7 @@
                           </a:solidFill>
                           <a:latin typeface="Nunito Sans"/>
                         </a:rPr>
-                        <a:t>Casi nada: 1 caso más</a:t>
+                        <a:t>Hago una búsqueda inversa</a:t>
                       </a:r>
                     </a:p>
                   </a:txBody>
@@ -7517,13 +7447,13 @@
                     <a:lstStyle/>
                     <a:p>
                       <a:r>
-                        <a:rPr sz="2000" b="0">
+                        <a:rPr sz="2000" b="1">
                           <a:solidFill>
                             <a:srgbClr val="1F2A44"/>
                           </a:solidFill>
                           <a:latin typeface="Nunito Sans"/>
                         </a:rPr>
-                        <a:t>«¡Bajan un 50 %!»</a:t>
+                        <a:t>Si no encuentro nada</a:t>
                       </a:r>
                     </a:p>
                   </a:txBody>
@@ -7545,29 +7475,7 @@
                           </a:solidFill>
                           <a:latin typeface="Nunito Sans"/>
                         </a:rPr>
-                        <a:t>2.000 → 1.000</a:t>
-                      </a:r>
-                    </a:p>
-                  </a:txBody>
-                  <a:tcPr>
-                    <a:solidFill>
-                      <a:srgbClr val="EAF0F7"/>
-                    </a:solidFill>
-                  </a:tcPr>
-                </a:tc>
-                <a:tc>
-                  <a:txBody>
-                    <a:bodyPr/>
-                    <a:lstStyle/>
-                    <a:p>
-                      <a:r>
-                        <a:rPr sz="2000" b="0">
-                          <a:solidFill>
-                            <a:srgbClr val="1F2A44"/>
-                          </a:solidFill>
-                          <a:latin typeface="Nunito Sans"/>
-                        </a:rPr>
-                        <a:t>Mucho: 1.000 menos</a:t>
+                        <a:t>No está comprobado: espero</a:t>
                       </a:r>
                     </a:p>
                   </a:txBody>
@@ -7578,182 +7486,10 @@
                   </a:tcPr>
                 </a:tc>
               </a:tr>
-              <a:tr h="600000">
-                <a:tc>
-                  <a:txBody>
-                    <a:bodyPr/>
-                    <a:lstStyle/>
-                    <a:p>
-                      <a:r>
-                        <a:rPr sz="2000" b="0">
-                          <a:solidFill>
-                            <a:srgbClr val="1F2A44"/>
-                          </a:solidFill>
-                          <a:latin typeface="Nunito Sans"/>
-                        </a:rPr>
-                        <a:t>«¡El triple de riesgo!»</a:t>
-                      </a:r>
-                    </a:p>
-                  </a:txBody>
-                  <a:tcPr>
-                    <a:solidFill>
-                      <a:srgbClr val="FFFFFF"/>
-                    </a:solidFill>
-                  </a:tcPr>
-                </a:tc>
-                <a:tc>
-                  <a:txBody>
-                    <a:bodyPr/>
-                    <a:lstStyle/>
-                    <a:p>
-                      <a:r>
-                        <a:rPr sz="2000" b="0">
-                          <a:solidFill>
-                            <a:srgbClr val="1F2A44"/>
-                          </a:solidFill>
-                          <a:latin typeface="Nunito Sans"/>
-                        </a:rPr>
-                        <a:t>1 de cada 10.000 → 3 de cada 10.000</a:t>
-                      </a:r>
-                    </a:p>
-                  </a:txBody>
-                  <a:tcPr>
-                    <a:solidFill>
-                      <a:srgbClr val="FFFFFF"/>
-                    </a:solidFill>
-                  </a:tcPr>
-                </a:tc>
-                <a:tc>
-                  <a:txBody>
-                    <a:bodyPr/>
-                    <a:lstStyle/>
-                    <a:p>
-                      <a:r>
-                        <a:rPr sz="2000" b="0">
-                          <a:solidFill>
-                            <a:srgbClr val="1F2A44"/>
-                          </a:solidFill>
-                          <a:latin typeface="Nunito Sans"/>
-                        </a:rPr>
-                        <a:t>Riesgo relativo: triple. Absoluto: sigue siendo muy raro</a:t>
-                      </a:r>
-                    </a:p>
-                  </a:txBody>
-                  <a:tcPr>
-                    <a:solidFill>
-                      <a:srgbClr val="FFFFFF"/>
-                    </a:solidFill>
-                  </a:tcPr>
-                </a:tc>
-              </a:tr>
             </a:tbl>
           </a:graphicData>
         </a:graphic>
       </p:graphicFrame>
-    </p:spTree>
-  </p:cSld>
-  <p:clrMapOvr>
-    <a:masterClrMapping/>
-  </p:clrMapOvr>
-</p:sld>
-</file>
-
-<file path=ppt/slides/slide9.xml><?xml version="1.0" encoding="utf-8"?>
-<p:sld xmlns:a="http://schemas.openxmlformats.org/drawingml/2006/main" xmlns:p="http://schemas.openxmlformats.org/presentationml/2006/main" xmlns:r="http://schemas.openxmlformats.org/officeDocument/2006/relationships">
-  <p:cSld>
-    <p:bg>
-      <p:bgPr>
-        <a:solidFill>
-          <a:srgbClr val="1F2A44"/>
-        </a:solidFill>
-        <a:effectLst/>
-      </p:bgPr>
-    </p:bg>
-    <p:spTree>
-      <p:nvGrpSpPr>
-        <p:cNvPr id="1" name=""/>
-        <p:cNvGrpSpPr/>
-        <p:nvPr/>
-      </p:nvGrpSpPr>
-      <p:grpSpPr/>
-      <p:sp>
-        <p:nvSpPr>
-          <p:cNvPr id="2" name="TextBox 1"/>
-          <p:cNvSpPr txBox="1"/>
-          <p:nvPr/>
-        </p:nvSpPr>
-        <p:spPr>
-          <a:xfrm>
-            <a:off x="640000" y="2300000"/>
-            <a:ext cx="10912000" cy="500000"/>
-          </a:xfrm>
-          <a:prstGeom prst="rect">
-            <a:avLst/>
-          </a:prstGeom>
-          <a:noFill/>
-        </p:spPr>
-        <p:txBody>
-          <a:bodyPr wrap="square">
-            <a:spAutoFit/>
-          </a:bodyPr>
-          <a:lstStyle/>
-          <a:p>
-            <a:pPr>
-              <a:spcAft>
-                <a:spcPts val="810"/>
-              </a:spcAft>
-            </a:pPr>
-            <a:r>
-              <a:rPr sz="1800" b="1">
-                <a:solidFill>
-                  <a:srgbClr val="F4B183"/>
-                </a:solidFill>
-                <a:latin typeface="Nunito Sans"/>
-              </a:rPr>
-              <a:t>BLOQUE 2</a:t>
-            </a:r>
-          </a:p>
-        </p:txBody>
-      </p:sp>
-      <p:sp>
-        <p:nvSpPr>
-          <p:cNvPr id="3" name="TextBox 2"/>
-          <p:cNvSpPr txBox="1"/>
-          <p:nvPr/>
-        </p:nvSpPr>
-        <p:spPr>
-          <a:xfrm>
-            <a:off x="640000" y="2800000"/>
-            <a:ext cx="10912000" cy="800000"/>
-          </a:xfrm>
-          <a:prstGeom prst="rect">
-            <a:avLst/>
-          </a:prstGeom>
-          <a:noFill/>
-        </p:spPr>
-        <p:txBody>
-          <a:bodyPr wrap="square">
-            <a:spAutoFit/>
-          </a:bodyPr>
-          <a:lstStyle/>
-          <a:p>
-            <a:pPr>
-              <a:spcAft>
-                <a:spcPts val="2160"/>
-              </a:spcAft>
-            </a:pPr>
-            <a:r>
-              <a:rPr sz="4800" b="1">
-                <a:solidFill>
-                  <a:srgbClr val="FBF7EF"/>
-                </a:solidFill>
-                <a:latin typeface="Fredoka"/>
-              </a:rPr>
-              <a:t>Casos resueltos</a:t>
-            </a:r>
-          </a:p>
-        </p:txBody>
-      </p:sp>
     </p:spTree>
   </p:cSld>
   <p:clrMapOvr>
